--- a/master_project/images_charts.pptx
+++ b/master_project/images_charts.pptx
@@ -104,11 +104,6 @@
       </a:defRPr>
     </a:lvl9pPr>
   </p:defaultTextStyle>
-  <p:extLst>
-    <p:ext uri="{EFAFB233-063F-42B5-8137-9DF3F51BA10A}">
-      <p15:sldGuideLst xmlns:p15="http://schemas.microsoft.com/office/powerpoint/2012/main"/>
-    </p:ext>
-  </p:extLst>
 </p:presentation>
 </file>
 
@@ -134,7 +129,7 @@
           <p:cNvPr id="2" name="Title 1">
             <a:extLst>
               <a:ext uri="{FF2B5EF4-FFF2-40B4-BE49-F238E27FC236}">
-                <a16:creationId xmlns:a16="http://schemas.microsoft.com/office/drawing/2014/main" id="{1172417B-95F9-9341-850C-A64DBA58915B}"/>
+                <a16:creationId xmlns:a16="http://schemas.microsoft.com/office/drawing/2014/main" id="{2A373BF7-56ED-FC44-BA84-68BF31993CCA}"/>
               </a:ext>
             </a:extLst>
           </p:cNvPr>
@@ -171,7 +166,7 @@
           <p:cNvPr id="3" name="Subtitle 2">
             <a:extLst>
               <a:ext uri="{FF2B5EF4-FFF2-40B4-BE49-F238E27FC236}">
-                <a16:creationId xmlns:a16="http://schemas.microsoft.com/office/drawing/2014/main" id="{D3C95544-1C05-E34C-9ED2-602FA5A20D60}"/>
+                <a16:creationId xmlns:a16="http://schemas.microsoft.com/office/drawing/2014/main" id="{D1A3389A-1E18-FA4B-AADA-DF60DD00DF22}"/>
               </a:ext>
             </a:extLst>
           </p:cNvPr>
@@ -241,7 +236,7 @@
           <p:cNvPr id="4" name="Date Placeholder 3">
             <a:extLst>
               <a:ext uri="{FF2B5EF4-FFF2-40B4-BE49-F238E27FC236}">
-                <a16:creationId xmlns:a16="http://schemas.microsoft.com/office/drawing/2014/main" id="{D88875A4-3438-3044-8EBF-EA09C962533F}"/>
+                <a16:creationId xmlns:a16="http://schemas.microsoft.com/office/drawing/2014/main" id="{B79D4C8B-C32B-3D4A-A548-8DA2C11C657C}"/>
               </a:ext>
             </a:extLst>
           </p:cNvPr>
@@ -257,9 +252,9 @@
           <a:bodyPr/>
           <a:lstStyle/>
           <a:p>
-            <a:fld id="{E3E846BE-4134-2044-B985-FB81F4ED91A7}" type="datetimeFigureOut">
+            <a:fld id="{A49347D3-74BA-2B44-8B5C-74FF05953E33}" type="datetimeFigureOut">
               <a:rPr lang="en-US" smtClean="0"/>
-              <a:t>1/11/21</a:t>
+              <a:t>1/19/21</a:t>
             </a:fld>
             <a:endParaRPr lang="en-US"/>
           </a:p>
@@ -270,7 +265,7 @@
           <p:cNvPr id="5" name="Footer Placeholder 4">
             <a:extLst>
               <a:ext uri="{FF2B5EF4-FFF2-40B4-BE49-F238E27FC236}">
-                <a16:creationId xmlns:a16="http://schemas.microsoft.com/office/drawing/2014/main" id="{84D45698-55CE-1A41-963B-26EFEF6A3D74}"/>
+                <a16:creationId xmlns:a16="http://schemas.microsoft.com/office/drawing/2014/main" id="{C5ED85DE-21CD-634F-B06D-36E8571F525F}"/>
               </a:ext>
             </a:extLst>
           </p:cNvPr>
@@ -295,7 +290,7 @@
           <p:cNvPr id="6" name="Slide Number Placeholder 5">
             <a:extLst>
               <a:ext uri="{FF2B5EF4-FFF2-40B4-BE49-F238E27FC236}">
-                <a16:creationId xmlns:a16="http://schemas.microsoft.com/office/drawing/2014/main" id="{D3C73835-7042-AC43-AD17-8242AECF18DC}"/>
+                <a16:creationId xmlns:a16="http://schemas.microsoft.com/office/drawing/2014/main" id="{6BA29E07-9705-6D43-84AF-215FEDDA9401}"/>
               </a:ext>
             </a:extLst>
           </p:cNvPr>
@@ -311,7 +306,7 @@
           <a:bodyPr/>
           <a:lstStyle/>
           <a:p>
-            <a:fld id="{6B9C629E-BD08-6D40-8232-1E3354C6533C}" type="slidenum">
+            <a:fld id="{1103B449-CEA9-4E4E-B4BD-0814C863F564}" type="slidenum">
               <a:rPr lang="en-US" smtClean="0"/>
               <a:t>‹#›</a:t>
             </a:fld>
@@ -322,7 +317,7 @@
     </p:spTree>
     <p:extLst>
       <p:ext uri="{BB962C8B-B14F-4D97-AF65-F5344CB8AC3E}">
-        <p14:creationId xmlns:p14="http://schemas.microsoft.com/office/powerpoint/2010/main" val="866714941"/>
+        <p14:creationId xmlns:p14="http://schemas.microsoft.com/office/powerpoint/2010/main" val="1043143517"/>
       </p:ext>
     </p:extLst>
   </p:cSld>
@@ -354,7 +349,7 @@
           <p:cNvPr id="2" name="Title 1">
             <a:extLst>
               <a:ext uri="{FF2B5EF4-FFF2-40B4-BE49-F238E27FC236}">
-                <a16:creationId xmlns:a16="http://schemas.microsoft.com/office/drawing/2014/main" id="{9E6AAF9E-F59D-0E49-9EAA-0C8B4F85627D}"/>
+                <a16:creationId xmlns:a16="http://schemas.microsoft.com/office/drawing/2014/main" id="{7124EDA1-03D9-3F48-BF6F-6F49ADB42B11}"/>
               </a:ext>
             </a:extLst>
           </p:cNvPr>
@@ -382,7 +377,7 @@
           <p:cNvPr id="3" name="Vertical Text Placeholder 2">
             <a:extLst>
               <a:ext uri="{FF2B5EF4-FFF2-40B4-BE49-F238E27FC236}">
-                <a16:creationId xmlns:a16="http://schemas.microsoft.com/office/drawing/2014/main" id="{D440A06F-1534-5140-8DA9-79B0A20A9C5C}"/>
+                <a16:creationId xmlns:a16="http://schemas.microsoft.com/office/drawing/2014/main" id="{1F5F8A8D-7602-6B4C-BA1F-A2B4D6E6EDBB}"/>
               </a:ext>
             </a:extLst>
           </p:cNvPr>
@@ -439,7 +434,7 @@
           <p:cNvPr id="4" name="Date Placeholder 3">
             <a:extLst>
               <a:ext uri="{FF2B5EF4-FFF2-40B4-BE49-F238E27FC236}">
-                <a16:creationId xmlns:a16="http://schemas.microsoft.com/office/drawing/2014/main" id="{019948CF-4678-124B-A10E-9AA7658DDB67}"/>
+                <a16:creationId xmlns:a16="http://schemas.microsoft.com/office/drawing/2014/main" id="{34CA7286-06BC-B043-9486-EB700FC46CAB}"/>
               </a:ext>
             </a:extLst>
           </p:cNvPr>
@@ -455,9 +450,9 @@
           <a:bodyPr/>
           <a:lstStyle/>
           <a:p>
-            <a:fld id="{E3E846BE-4134-2044-B985-FB81F4ED91A7}" type="datetimeFigureOut">
+            <a:fld id="{A49347D3-74BA-2B44-8B5C-74FF05953E33}" type="datetimeFigureOut">
               <a:rPr lang="en-US" smtClean="0"/>
-              <a:t>1/11/21</a:t>
+              <a:t>1/19/21</a:t>
             </a:fld>
             <a:endParaRPr lang="en-US"/>
           </a:p>
@@ -468,7 +463,7 @@
           <p:cNvPr id="5" name="Footer Placeholder 4">
             <a:extLst>
               <a:ext uri="{FF2B5EF4-FFF2-40B4-BE49-F238E27FC236}">
-                <a16:creationId xmlns:a16="http://schemas.microsoft.com/office/drawing/2014/main" id="{0634565E-A2F6-7846-A50D-E22BA5D10C4D}"/>
+                <a16:creationId xmlns:a16="http://schemas.microsoft.com/office/drawing/2014/main" id="{214D5628-7D4A-D042-AD54-81E99A67BF9A}"/>
               </a:ext>
             </a:extLst>
           </p:cNvPr>
@@ -493,7 +488,7 @@
           <p:cNvPr id="6" name="Slide Number Placeholder 5">
             <a:extLst>
               <a:ext uri="{FF2B5EF4-FFF2-40B4-BE49-F238E27FC236}">
-                <a16:creationId xmlns:a16="http://schemas.microsoft.com/office/drawing/2014/main" id="{4ED636AD-13A5-9B47-ACF0-B1F806370210}"/>
+                <a16:creationId xmlns:a16="http://schemas.microsoft.com/office/drawing/2014/main" id="{66610E16-3B12-CD4A-9F99-3C91B5FAF8AA}"/>
               </a:ext>
             </a:extLst>
           </p:cNvPr>
@@ -509,7 +504,7 @@
           <a:bodyPr/>
           <a:lstStyle/>
           <a:p>
-            <a:fld id="{6B9C629E-BD08-6D40-8232-1E3354C6533C}" type="slidenum">
+            <a:fld id="{1103B449-CEA9-4E4E-B4BD-0814C863F564}" type="slidenum">
               <a:rPr lang="en-US" smtClean="0"/>
               <a:t>‹#›</a:t>
             </a:fld>
@@ -520,7 +515,7 @@
     </p:spTree>
     <p:extLst>
       <p:ext uri="{BB962C8B-B14F-4D97-AF65-F5344CB8AC3E}">
-        <p14:creationId xmlns:p14="http://schemas.microsoft.com/office/powerpoint/2010/main" val="1236727620"/>
+        <p14:creationId xmlns:p14="http://schemas.microsoft.com/office/powerpoint/2010/main" val="2306738164"/>
       </p:ext>
     </p:extLst>
   </p:cSld>
@@ -552,7 +547,7 @@
           <p:cNvPr id="2" name="Vertical Title 1">
             <a:extLst>
               <a:ext uri="{FF2B5EF4-FFF2-40B4-BE49-F238E27FC236}">
-                <a16:creationId xmlns:a16="http://schemas.microsoft.com/office/drawing/2014/main" id="{A6329C96-8020-D045-B209-F0F31E826C33}"/>
+                <a16:creationId xmlns:a16="http://schemas.microsoft.com/office/drawing/2014/main" id="{85C89C25-22C0-CE42-B003-AB6B1E861115}"/>
               </a:ext>
             </a:extLst>
           </p:cNvPr>
@@ -585,7 +580,7 @@
           <p:cNvPr id="3" name="Vertical Text Placeholder 2">
             <a:extLst>
               <a:ext uri="{FF2B5EF4-FFF2-40B4-BE49-F238E27FC236}">
-                <a16:creationId xmlns:a16="http://schemas.microsoft.com/office/drawing/2014/main" id="{118F8402-349A-A843-A2C2-123975C08BBD}"/>
+                <a16:creationId xmlns:a16="http://schemas.microsoft.com/office/drawing/2014/main" id="{03E1755E-5FB5-E840-9821-75CDE68B1225}"/>
               </a:ext>
             </a:extLst>
           </p:cNvPr>
@@ -647,7 +642,7 @@
           <p:cNvPr id="4" name="Date Placeholder 3">
             <a:extLst>
               <a:ext uri="{FF2B5EF4-FFF2-40B4-BE49-F238E27FC236}">
-                <a16:creationId xmlns:a16="http://schemas.microsoft.com/office/drawing/2014/main" id="{C7456D55-7E16-3045-A48C-EADC44B623E0}"/>
+                <a16:creationId xmlns:a16="http://schemas.microsoft.com/office/drawing/2014/main" id="{230AB8A9-6E76-F749-96A6-050AFB7401FF}"/>
               </a:ext>
             </a:extLst>
           </p:cNvPr>
@@ -663,9 +658,9 @@
           <a:bodyPr/>
           <a:lstStyle/>
           <a:p>
-            <a:fld id="{E3E846BE-4134-2044-B985-FB81F4ED91A7}" type="datetimeFigureOut">
+            <a:fld id="{A49347D3-74BA-2B44-8B5C-74FF05953E33}" type="datetimeFigureOut">
               <a:rPr lang="en-US" smtClean="0"/>
-              <a:t>1/11/21</a:t>
+              <a:t>1/19/21</a:t>
             </a:fld>
             <a:endParaRPr lang="en-US"/>
           </a:p>
@@ -676,7 +671,7 @@
           <p:cNvPr id="5" name="Footer Placeholder 4">
             <a:extLst>
               <a:ext uri="{FF2B5EF4-FFF2-40B4-BE49-F238E27FC236}">
-                <a16:creationId xmlns:a16="http://schemas.microsoft.com/office/drawing/2014/main" id="{DBFCBDFD-DF49-0042-A5C7-87E239C0910A}"/>
+                <a16:creationId xmlns:a16="http://schemas.microsoft.com/office/drawing/2014/main" id="{6E9D18E6-49B2-C246-8337-631348A0B840}"/>
               </a:ext>
             </a:extLst>
           </p:cNvPr>
@@ -701,7 +696,7 @@
           <p:cNvPr id="6" name="Slide Number Placeholder 5">
             <a:extLst>
               <a:ext uri="{FF2B5EF4-FFF2-40B4-BE49-F238E27FC236}">
-                <a16:creationId xmlns:a16="http://schemas.microsoft.com/office/drawing/2014/main" id="{343CF037-BC46-2848-A223-6813F2E22308}"/>
+                <a16:creationId xmlns:a16="http://schemas.microsoft.com/office/drawing/2014/main" id="{2A9E43A6-8055-C341-A1E8-C21F009F9F37}"/>
               </a:ext>
             </a:extLst>
           </p:cNvPr>
@@ -717,7 +712,7 @@
           <a:bodyPr/>
           <a:lstStyle/>
           <a:p>
-            <a:fld id="{6B9C629E-BD08-6D40-8232-1E3354C6533C}" type="slidenum">
+            <a:fld id="{1103B449-CEA9-4E4E-B4BD-0814C863F564}" type="slidenum">
               <a:rPr lang="en-US" smtClean="0"/>
               <a:t>‹#›</a:t>
             </a:fld>
@@ -728,7 +723,7 @@
     </p:spTree>
     <p:extLst>
       <p:ext uri="{BB962C8B-B14F-4D97-AF65-F5344CB8AC3E}">
-        <p14:creationId xmlns:p14="http://schemas.microsoft.com/office/powerpoint/2010/main" val="1346468542"/>
+        <p14:creationId xmlns:p14="http://schemas.microsoft.com/office/powerpoint/2010/main" val="4145602486"/>
       </p:ext>
     </p:extLst>
   </p:cSld>
@@ -760,7 +755,7 @@
           <p:cNvPr id="2" name="Title 1">
             <a:extLst>
               <a:ext uri="{FF2B5EF4-FFF2-40B4-BE49-F238E27FC236}">
-                <a16:creationId xmlns:a16="http://schemas.microsoft.com/office/drawing/2014/main" id="{EF616F56-CFD4-FB4E-B61F-BBCD4DC5CCD3}"/>
+                <a16:creationId xmlns:a16="http://schemas.microsoft.com/office/drawing/2014/main" id="{E421F81E-2207-9248-B37B-86A869AB2F63}"/>
               </a:ext>
             </a:extLst>
           </p:cNvPr>
@@ -788,7 +783,7 @@
           <p:cNvPr id="3" name="Content Placeholder 2">
             <a:extLst>
               <a:ext uri="{FF2B5EF4-FFF2-40B4-BE49-F238E27FC236}">
-                <a16:creationId xmlns:a16="http://schemas.microsoft.com/office/drawing/2014/main" id="{9E9200AC-D9CF-E046-BA5A-F8B60BCCEDBC}"/>
+                <a16:creationId xmlns:a16="http://schemas.microsoft.com/office/drawing/2014/main" id="{BF4C8D0B-0281-9843-9B25-C569839A20A2}"/>
               </a:ext>
             </a:extLst>
           </p:cNvPr>
@@ -845,7 +840,7 @@
           <p:cNvPr id="4" name="Date Placeholder 3">
             <a:extLst>
               <a:ext uri="{FF2B5EF4-FFF2-40B4-BE49-F238E27FC236}">
-                <a16:creationId xmlns:a16="http://schemas.microsoft.com/office/drawing/2014/main" id="{F6520D11-2BDD-8640-8F27-8C333A3DB937}"/>
+                <a16:creationId xmlns:a16="http://schemas.microsoft.com/office/drawing/2014/main" id="{B64E6E76-A152-764C-89E4-A19B49645D6D}"/>
               </a:ext>
             </a:extLst>
           </p:cNvPr>
@@ -861,9 +856,9 @@
           <a:bodyPr/>
           <a:lstStyle/>
           <a:p>
-            <a:fld id="{E3E846BE-4134-2044-B985-FB81F4ED91A7}" type="datetimeFigureOut">
+            <a:fld id="{A49347D3-74BA-2B44-8B5C-74FF05953E33}" type="datetimeFigureOut">
               <a:rPr lang="en-US" smtClean="0"/>
-              <a:t>1/11/21</a:t>
+              <a:t>1/19/21</a:t>
             </a:fld>
             <a:endParaRPr lang="en-US"/>
           </a:p>
@@ -874,7 +869,7 @@
           <p:cNvPr id="5" name="Footer Placeholder 4">
             <a:extLst>
               <a:ext uri="{FF2B5EF4-FFF2-40B4-BE49-F238E27FC236}">
-                <a16:creationId xmlns:a16="http://schemas.microsoft.com/office/drawing/2014/main" id="{A080BE21-0E15-7648-BE0D-EDF909BD8416}"/>
+                <a16:creationId xmlns:a16="http://schemas.microsoft.com/office/drawing/2014/main" id="{938DA43C-FF40-6848-9300-4C5EBB779286}"/>
               </a:ext>
             </a:extLst>
           </p:cNvPr>
@@ -899,7 +894,7 @@
           <p:cNvPr id="6" name="Slide Number Placeholder 5">
             <a:extLst>
               <a:ext uri="{FF2B5EF4-FFF2-40B4-BE49-F238E27FC236}">
-                <a16:creationId xmlns:a16="http://schemas.microsoft.com/office/drawing/2014/main" id="{376E8012-3E9C-FB44-B27E-A75D0A9C4F9D}"/>
+                <a16:creationId xmlns:a16="http://schemas.microsoft.com/office/drawing/2014/main" id="{362409E8-7560-2640-BC2A-85F93B45F373}"/>
               </a:ext>
             </a:extLst>
           </p:cNvPr>
@@ -915,7 +910,7 @@
           <a:bodyPr/>
           <a:lstStyle/>
           <a:p>
-            <a:fld id="{6B9C629E-BD08-6D40-8232-1E3354C6533C}" type="slidenum">
+            <a:fld id="{1103B449-CEA9-4E4E-B4BD-0814C863F564}" type="slidenum">
               <a:rPr lang="en-US" smtClean="0"/>
               <a:t>‹#›</a:t>
             </a:fld>
@@ -926,7 +921,7 @@
     </p:spTree>
     <p:extLst>
       <p:ext uri="{BB962C8B-B14F-4D97-AF65-F5344CB8AC3E}">
-        <p14:creationId xmlns:p14="http://schemas.microsoft.com/office/powerpoint/2010/main" val="1778769837"/>
+        <p14:creationId xmlns:p14="http://schemas.microsoft.com/office/powerpoint/2010/main" val="1939703007"/>
       </p:ext>
     </p:extLst>
   </p:cSld>
@@ -958,7 +953,7 @@
           <p:cNvPr id="2" name="Title 1">
             <a:extLst>
               <a:ext uri="{FF2B5EF4-FFF2-40B4-BE49-F238E27FC236}">
-                <a16:creationId xmlns:a16="http://schemas.microsoft.com/office/drawing/2014/main" id="{E4DA6E70-5154-CF40-ADD7-CE841BA22319}"/>
+                <a16:creationId xmlns:a16="http://schemas.microsoft.com/office/drawing/2014/main" id="{576935CB-2C39-FE40-AF43-C9E461800F0B}"/>
               </a:ext>
             </a:extLst>
           </p:cNvPr>
@@ -995,7 +990,7 @@
           <p:cNvPr id="3" name="Text Placeholder 2">
             <a:extLst>
               <a:ext uri="{FF2B5EF4-FFF2-40B4-BE49-F238E27FC236}">
-                <a16:creationId xmlns:a16="http://schemas.microsoft.com/office/drawing/2014/main" id="{08D2CB99-CB2D-C745-83DA-14B3FAA1299E}"/>
+                <a16:creationId xmlns:a16="http://schemas.microsoft.com/office/drawing/2014/main" id="{D2B4F8F1-2628-4C4B-BC42-681410DBEBE7}"/>
               </a:ext>
             </a:extLst>
           </p:cNvPr>
@@ -1120,7 +1115,7 @@
           <p:cNvPr id="4" name="Date Placeholder 3">
             <a:extLst>
               <a:ext uri="{FF2B5EF4-FFF2-40B4-BE49-F238E27FC236}">
-                <a16:creationId xmlns:a16="http://schemas.microsoft.com/office/drawing/2014/main" id="{FC6D655C-D8D8-C441-9C29-1D43664F2761}"/>
+                <a16:creationId xmlns:a16="http://schemas.microsoft.com/office/drawing/2014/main" id="{1A8E84F6-F210-4246-9B38-75FAA67B4103}"/>
               </a:ext>
             </a:extLst>
           </p:cNvPr>
@@ -1136,9 +1131,9 @@
           <a:bodyPr/>
           <a:lstStyle/>
           <a:p>
-            <a:fld id="{E3E846BE-4134-2044-B985-FB81F4ED91A7}" type="datetimeFigureOut">
+            <a:fld id="{A49347D3-74BA-2B44-8B5C-74FF05953E33}" type="datetimeFigureOut">
               <a:rPr lang="en-US" smtClean="0"/>
-              <a:t>1/11/21</a:t>
+              <a:t>1/19/21</a:t>
             </a:fld>
             <a:endParaRPr lang="en-US"/>
           </a:p>
@@ -1149,7 +1144,7 @@
           <p:cNvPr id="5" name="Footer Placeholder 4">
             <a:extLst>
               <a:ext uri="{FF2B5EF4-FFF2-40B4-BE49-F238E27FC236}">
-                <a16:creationId xmlns:a16="http://schemas.microsoft.com/office/drawing/2014/main" id="{809770BF-966B-4542-A774-A4F013D61D2E}"/>
+                <a16:creationId xmlns:a16="http://schemas.microsoft.com/office/drawing/2014/main" id="{05E12473-0DD5-7740-BCE3-4092F67621F9}"/>
               </a:ext>
             </a:extLst>
           </p:cNvPr>
@@ -1174,7 +1169,7 @@
           <p:cNvPr id="6" name="Slide Number Placeholder 5">
             <a:extLst>
               <a:ext uri="{FF2B5EF4-FFF2-40B4-BE49-F238E27FC236}">
-                <a16:creationId xmlns:a16="http://schemas.microsoft.com/office/drawing/2014/main" id="{A80AE4F1-33A8-5D46-B036-D4F772C07A7E}"/>
+                <a16:creationId xmlns:a16="http://schemas.microsoft.com/office/drawing/2014/main" id="{B7F1FA1A-7505-EC4F-B111-9CC1EFFF9440}"/>
               </a:ext>
             </a:extLst>
           </p:cNvPr>
@@ -1190,7 +1185,7 @@
           <a:bodyPr/>
           <a:lstStyle/>
           <a:p>
-            <a:fld id="{6B9C629E-BD08-6D40-8232-1E3354C6533C}" type="slidenum">
+            <a:fld id="{1103B449-CEA9-4E4E-B4BD-0814C863F564}" type="slidenum">
               <a:rPr lang="en-US" smtClean="0"/>
               <a:t>‹#›</a:t>
             </a:fld>
@@ -1201,7 +1196,7 @@
     </p:spTree>
     <p:extLst>
       <p:ext uri="{BB962C8B-B14F-4D97-AF65-F5344CB8AC3E}">
-        <p14:creationId xmlns:p14="http://schemas.microsoft.com/office/powerpoint/2010/main" val="1966253412"/>
+        <p14:creationId xmlns:p14="http://schemas.microsoft.com/office/powerpoint/2010/main" val="2640387617"/>
       </p:ext>
     </p:extLst>
   </p:cSld>
@@ -1233,7 +1228,7 @@
           <p:cNvPr id="2" name="Title 1">
             <a:extLst>
               <a:ext uri="{FF2B5EF4-FFF2-40B4-BE49-F238E27FC236}">
-                <a16:creationId xmlns:a16="http://schemas.microsoft.com/office/drawing/2014/main" id="{0B726D5C-718E-424E-A0CB-A02647E81925}"/>
+                <a16:creationId xmlns:a16="http://schemas.microsoft.com/office/drawing/2014/main" id="{E8A7D029-1619-E04E-B943-B4AE3911A428}"/>
               </a:ext>
             </a:extLst>
           </p:cNvPr>
@@ -1261,7 +1256,7 @@
           <p:cNvPr id="3" name="Content Placeholder 2">
             <a:extLst>
               <a:ext uri="{FF2B5EF4-FFF2-40B4-BE49-F238E27FC236}">
-                <a16:creationId xmlns:a16="http://schemas.microsoft.com/office/drawing/2014/main" id="{7BF20387-2D7F-D942-A581-BCDD45FDB183}"/>
+                <a16:creationId xmlns:a16="http://schemas.microsoft.com/office/drawing/2014/main" id="{CE4444DF-C8C1-9446-904C-36CB80D70E9F}"/>
               </a:ext>
             </a:extLst>
           </p:cNvPr>
@@ -1323,7 +1318,7 @@
           <p:cNvPr id="4" name="Content Placeholder 3">
             <a:extLst>
               <a:ext uri="{FF2B5EF4-FFF2-40B4-BE49-F238E27FC236}">
-                <a16:creationId xmlns:a16="http://schemas.microsoft.com/office/drawing/2014/main" id="{74A15698-FD3A-EE47-88C8-D16B3E1A948E}"/>
+                <a16:creationId xmlns:a16="http://schemas.microsoft.com/office/drawing/2014/main" id="{2BE6E41F-D45F-3540-9C18-64523F1F42A9}"/>
               </a:ext>
             </a:extLst>
           </p:cNvPr>
@@ -1385,7 +1380,7 @@
           <p:cNvPr id="5" name="Date Placeholder 4">
             <a:extLst>
               <a:ext uri="{FF2B5EF4-FFF2-40B4-BE49-F238E27FC236}">
-                <a16:creationId xmlns:a16="http://schemas.microsoft.com/office/drawing/2014/main" id="{1C5D9A07-7F75-BF48-AFA5-F76CBC7A3C4E}"/>
+                <a16:creationId xmlns:a16="http://schemas.microsoft.com/office/drawing/2014/main" id="{36F09177-64A4-B048-9E3B-CFA8F390B4D8}"/>
               </a:ext>
             </a:extLst>
           </p:cNvPr>
@@ -1401,9 +1396,9 @@
           <a:bodyPr/>
           <a:lstStyle/>
           <a:p>
-            <a:fld id="{E3E846BE-4134-2044-B985-FB81F4ED91A7}" type="datetimeFigureOut">
+            <a:fld id="{A49347D3-74BA-2B44-8B5C-74FF05953E33}" type="datetimeFigureOut">
               <a:rPr lang="en-US" smtClean="0"/>
-              <a:t>1/11/21</a:t>
+              <a:t>1/19/21</a:t>
             </a:fld>
             <a:endParaRPr lang="en-US"/>
           </a:p>
@@ -1414,7 +1409,7 @@
           <p:cNvPr id="6" name="Footer Placeholder 5">
             <a:extLst>
               <a:ext uri="{FF2B5EF4-FFF2-40B4-BE49-F238E27FC236}">
-                <a16:creationId xmlns:a16="http://schemas.microsoft.com/office/drawing/2014/main" id="{4E98E301-8D72-A046-A6DC-9D104F2FBEE5}"/>
+                <a16:creationId xmlns:a16="http://schemas.microsoft.com/office/drawing/2014/main" id="{536DA23C-404E-3943-9B64-4C8C4AEB7AD1}"/>
               </a:ext>
             </a:extLst>
           </p:cNvPr>
@@ -1439,7 +1434,7 @@
           <p:cNvPr id="7" name="Slide Number Placeholder 6">
             <a:extLst>
               <a:ext uri="{FF2B5EF4-FFF2-40B4-BE49-F238E27FC236}">
-                <a16:creationId xmlns:a16="http://schemas.microsoft.com/office/drawing/2014/main" id="{FE308753-FB48-544E-8C7E-273E9BBEB69F}"/>
+                <a16:creationId xmlns:a16="http://schemas.microsoft.com/office/drawing/2014/main" id="{8AFE1E24-7978-6E4E-A950-24AE07A45F4C}"/>
               </a:ext>
             </a:extLst>
           </p:cNvPr>
@@ -1455,7 +1450,7 @@
           <a:bodyPr/>
           <a:lstStyle/>
           <a:p>
-            <a:fld id="{6B9C629E-BD08-6D40-8232-1E3354C6533C}" type="slidenum">
+            <a:fld id="{1103B449-CEA9-4E4E-B4BD-0814C863F564}" type="slidenum">
               <a:rPr lang="en-US" smtClean="0"/>
               <a:t>‹#›</a:t>
             </a:fld>
@@ -1466,7 +1461,7 @@
     </p:spTree>
     <p:extLst>
       <p:ext uri="{BB962C8B-B14F-4D97-AF65-F5344CB8AC3E}">
-        <p14:creationId xmlns:p14="http://schemas.microsoft.com/office/powerpoint/2010/main" val="3314446770"/>
+        <p14:creationId xmlns:p14="http://schemas.microsoft.com/office/powerpoint/2010/main" val="1901431643"/>
       </p:ext>
     </p:extLst>
   </p:cSld>
@@ -1498,7 +1493,7 @@
           <p:cNvPr id="2" name="Title 1">
             <a:extLst>
               <a:ext uri="{FF2B5EF4-FFF2-40B4-BE49-F238E27FC236}">
-                <a16:creationId xmlns:a16="http://schemas.microsoft.com/office/drawing/2014/main" id="{3C761E8E-F44A-BD47-B2E0-6EA46C0EF562}"/>
+                <a16:creationId xmlns:a16="http://schemas.microsoft.com/office/drawing/2014/main" id="{6CCF6679-3013-784A-819E-F5666284699F}"/>
               </a:ext>
             </a:extLst>
           </p:cNvPr>
@@ -1531,7 +1526,7 @@
           <p:cNvPr id="3" name="Text Placeholder 2">
             <a:extLst>
               <a:ext uri="{FF2B5EF4-FFF2-40B4-BE49-F238E27FC236}">
-                <a16:creationId xmlns:a16="http://schemas.microsoft.com/office/drawing/2014/main" id="{87FF227C-AFEB-4644-B2C3-4008FCED7164}"/>
+                <a16:creationId xmlns:a16="http://schemas.microsoft.com/office/drawing/2014/main" id="{40D88FA6-7F59-C84A-AAD2-59F6DEFDFBF0}"/>
               </a:ext>
             </a:extLst>
           </p:cNvPr>
@@ -1602,7 +1597,7 @@
           <p:cNvPr id="4" name="Content Placeholder 3">
             <a:extLst>
               <a:ext uri="{FF2B5EF4-FFF2-40B4-BE49-F238E27FC236}">
-                <a16:creationId xmlns:a16="http://schemas.microsoft.com/office/drawing/2014/main" id="{65C4986C-EC79-FA41-96AF-F3C70A76299A}"/>
+                <a16:creationId xmlns:a16="http://schemas.microsoft.com/office/drawing/2014/main" id="{6B480BBA-910D-8844-A734-98706C79FC49}"/>
               </a:ext>
             </a:extLst>
           </p:cNvPr>
@@ -1664,7 +1659,7 @@
           <p:cNvPr id="5" name="Text Placeholder 4">
             <a:extLst>
               <a:ext uri="{FF2B5EF4-FFF2-40B4-BE49-F238E27FC236}">
-                <a16:creationId xmlns:a16="http://schemas.microsoft.com/office/drawing/2014/main" id="{CEF84297-15AB-A14B-A65E-97186D1A5DC3}"/>
+                <a16:creationId xmlns:a16="http://schemas.microsoft.com/office/drawing/2014/main" id="{AC2C64CC-5B47-1B4C-A22F-47A69C4139DF}"/>
               </a:ext>
             </a:extLst>
           </p:cNvPr>
@@ -1735,7 +1730,7 @@
           <p:cNvPr id="6" name="Content Placeholder 5">
             <a:extLst>
               <a:ext uri="{FF2B5EF4-FFF2-40B4-BE49-F238E27FC236}">
-                <a16:creationId xmlns:a16="http://schemas.microsoft.com/office/drawing/2014/main" id="{063F6EED-0A4A-A147-97BB-EA8AC5770C06}"/>
+                <a16:creationId xmlns:a16="http://schemas.microsoft.com/office/drawing/2014/main" id="{78A5DB74-6642-4F4E-9802-7AF977D5E3D0}"/>
               </a:ext>
             </a:extLst>
           </p:cNvPr>
@@ -1797,7 +1792,7 @@
           <p:cNvPr id="7" name="Date Placeholder 6">
             <a:extLst>
               <a:ext uri="{FF2B5EF4-FFF2-40B4-BE49-F238E27FC236}">
-                <a16:creationId xmlns:a16="http://schemas.microsoft.com/office/drawing/2014/main" id="{4CCB4758-E94C-6942-B7AF-B5E275DBF8A5}"/>
+                <a16:creationId xmlns:a16="http://schemas.microsoft.com/office/drawing/2014/main" id="{C82477AA-1B3A-DC4D-81B4-1D3A9712A4AB}"/>
               </a:ext>
             </a:extLst>
           </p:cNvPr>
@@ -1813,9 +1808,9 @@
           <a:bodyPr/>
           <a:lstStyle/>
           <a:p>
-            <a:fld id="{E3E846BE-4134-2044-B985-FB81F4ED91A7}" type="datetimeFigureOut">
+            <a:fld id="{A49347D3-74BA-2B44-8B5C-74FF05953E33}" type="datetimeFigureOut">
               <a:rPr lang="en-US" smtClean="0"/>
-              <a:t>1/11/21</a:t>
+              <a:t>1/19/21</a:t>
             </a:fld>
             <a:endParaRPr lang="en-US"/>
           </a:p>
@@ -1826,7 +1821,7 @@
           <p:cNvPr id="8" name="Footer Placeholder 7">
             <a:extLst>
               <a:ext uri="{FF2B5EF4-FFF2-40B4-BE49-F238E27FC236}">
-                <a16:creationId xmlns:a16="http://schemas.microsoft.com/office/drawing/2014/main" id="{97FF717E-0017-1246-A24F-483A589EADCE}"/>
+                <a16:creationId xmlns:a16="http://schemas.microsoft.com/office/drawing/2014/main" id="{4BD195D2-DEAC-434C-8C10-7958B889AEF3}"/>
               </a:ext>
             </a:extLst>
           </p:cNvPr>
@@ -1851,7 +1846,7 @@
           <p:cNvPr id="9" name="Slide Number Placeholder 8">
             <a:extLst>
               <a:ext uri="{FF2B5EF4-FFF2-40B4-BE49-F238E27FC236}">
-                <a16:creationId xmlns:a16="http://schemas.microsoft.com/office/drawing/2014/main" id="{E6F018C7-7DCF-4E40-80FC-1D7E570D5E9F}"/>
+                <a16:creationId xmlns:a16="http://schemas.microsoft.com/office/drawing/2014/main" id="{5AF11235-B244-1D41-8FAB-8E73A535C551}"/>
               </a:ext>
             </a:extLst>
           </p:cNvPr>
@@ -1867,7 +1862,7 @@
           <a:bodyPr/>
           <a:lstStyle/>
           <a:p>
-            <a:fld id="{6B9C629E-BD08-6D40-8232-1E3354C6533C}" type="slidenum">
+            <a:fld id="{1103B449-CEA9-4E4E-B4BD-0814C863F564}" type="slidenum">
               <a:rPr lang="en-US" smtClean="0"/>
               <a:t>‹#›</a:t>
             </a:fld>
@@ -1878,7 +1873,7 @@
     </p:spTree>
     <p:extLst>
       <p:ext uri="{BB962C8B-B14F-4D97-AF65-F5344CB8AC3E}">
-        <p14:creationId xmlns:p14="http://schemas.microsoft.com/office/powerpoint/2010/main" val="3018618608"/>
+        <p14:creationId xmlns:p14="http://schemas.microsoft.com/office/powerpoint/2010/main" val="1756000371"/>
       </p:ext>
     </p:extLst>
   </p:cSld>
@@ -1910,7 +1905,7 @@
           <p:cNvPr id="2" name="Title 1">
             <a:extLst>
               <a:ext uri="{FF2B5EF4-FFF2-40B4-BE49-F238E27FC236}">
-                <a16:creationId xmlns:a16="http://schemas.microsoft.com/office/drawing/2014/main" id="{BCC77D30-CC19-644C-9C93-E1BF5CB733BD}"/>
+                <a16:creationId xmlns:a16="http://schemas.microsoft.com/office/drawing/2014/main" id="{47B1A247-1F64-AF41-9512-EA9A7B22563A}"/>
               </a:ext>
             </a:extLst>
           </p:cNvPr>
@@ -1938,7 +1933,7 @@
           <p:cNvPr id="3" name="Date Placeholder 2">
             <a:extLst>
               <a:ext uri="{FF2B5EF4-FFF2-40B4-BE49-F238E27FC236}">
-                <a16:creationId xmlns:a16="http://schemas.microsoft.com/office/drawing/2014/main" id="{81A7C27D-DC74-4645-A6E6-8B52D8773C70}"/>
+                <a16:creationId xmlns:a16="http://schemas.microsoft.com/office/drawing/2014/main" id="{C4BAEBF3-C79F-3D4E-A974-3DD74F301C86}"/>
               </a:ext>
             </a:extLst>
           </p:cNvPr>
@@ -1954,9 +1949,9 @@
           <a:bodyPr/>
           <a:lstStyle/>
           <a:p>
-            <a:fld id="{E3E846BE-4134-2044-B985-FB81F4ED91A7}" type="datetimeFigureOut">
+            <a:fld id="{A49347D3-74BA-2B44-8B5C-74FF05953E33}" type="datetimeFigureOut">
               <a:rPr lang="en-US" smtClean="0"/>
-              <a:t>1/11/21</a:t>
+              <a:t>1/19/21</a:t>
             </a:fld>
             <a:endParaRPr lang="en-US"/>
           </a:p>
@@ -1967,7 +1962,7 @@
           <p:cNvPr id="4" name="Footer Placeholder 3">
             <a:extLst>
               <a:ext uri="{FF2B5EF4-FFF2-40B4-BE49-F238E27FC236}">
-                <a16:creationId xmlns:a16="http://schemas.microsoft.com/office/drawing/2014/main" id="{63C29837-C664-CD4B-A1B7-1BCE7CE7E372}"/>
+                <a16:creationId xmlns:a16="http://schemas.microsoft.com/office/drawing/2014/main" id="{BDDD0E5E-C608-5641-B4B7-C2C007373885}"/>
               </a:ext>
             </a:extLst>
           </p:cNvPr>
@@ -1992,7 +1987,7 @@
           <p:cNvPr id="5" name="Slide Number Placeholder 4">
             <a:extLst>
               <a:ext uri="{FF2B5EF4-FFF2-40B4-BE49-F238E27FC236}">
-                <a16:creationId xmlns:a16="http://schemas.microsoft.com/office/drawing/2014/main" id="{4A5364E9-6C7B-0249-AC34-26D2C512DBB9}"/>
+                <a16:creationId xmlns:a16="http://schemas.microsoft.com/office/drawing/2014/main" id="{9FB7B2FE-0948-AC4A-BD98-15D704172D6D}"/>
               </a:ext>
             </a:extLst>
           </p:cNvPr>
@@ -2008,7 +2003,7 @@
           <a:bodyPr/>
           <a:lstStyle/>
           <a:p>
-            <a:fld id="{6B9C629E-BD08-6D40-8232-1E3354C6533C}" type="slidenum">
+            <a:fld id="{1103B449-CEA9-4E4E-B4BD-0814C863F564}" type="slidenum">
               <a:rPr lang="en-US" smtClean="0"/>
               <a:t>‹#›</a:t>
             </a:fld>
@@ -2019,7 +2014,7 @@
     </p:spTree>
     <p:extLst>
       <p:ext uri="{BB962C8B-B14F-4D97-AF65-F5344CB8AC3E}">
-        <p14:creationId xmlns:p14="http://schemas.microsoft.com/office/powerpoint/2010/main" val="588241760"/>
+        <p14:creationId xmlns:p14="http://schemas.microsoft.com/office/powerpoint/2010/main" val="3617326270"/>
       </p:ext>
     </p:extLst>
   </p:cSld>
@@ -2051,7 +2046,7 @@
           <p:cNvPr id="2" name="Date Placeholder 1">
             <a:extLst>
               <a:ext uri="{FF2B5EF4-FFF2-40B4-BE49-F238E27FC236}">
-                <a16:creationId xmlns:a16="http://schemas.microsoft.com/office/drawing/2014/main" id="{D8FCA9BF-CA6D-CE49-8BCC-E54BDD6C9DC7}"/>
+                <a16:creationId xmlns:a16="http://schemas.microsoft.com/office/drawing/2014/main" id="{FF0D44EE-0E63-FE49-B1CF-321E14DC7018}"/>
               </a:ext>
             </a:extLst>
           </p:cNvPr>
@@ -2067,9 +2062,9 @@
           <a:bodyPr/>
           <a:lstStyle/>
           <a:p>
-            <a:fld id="{E3E846BE-4134-2044-B985-FB81F4ED91A7}" type="datetimeFigureOut">
+            <a:fld id="{A49347D3-74BA-2B44-8B5C-74FF05953E33}" type="datetimeFigureOut">
               <a:rPr lang="en-US" smtClean="0"/>
-              <a:t>1/11/21</a:t>
+              <a:t>1/19/21</a:t>
             </a:fld>
             <a:endParaRPr lang="en-US"/>
           </a:p>
@@ -2080,7 +2075,7 @@
           <p:cNvPr id="3" name="Footer Placeholder 2">
             <a:extLst>
               <a:ext uri="{FF2B5EF4-FFF2-40B4-BE49-F238E27FC236}">
-                <a16:creationId xmlns:a16="http://schemas.microsoft.com/office/drawing/2014/main" id="{AAF9482D-BD6E-AE4B-B135-C147513D05EA}"/>
+                <a16:creationId xmlns:a16="http://schemas.microsoft.com/office/drawing/2014/main" id="{AC79BC54-93B7-8F4F-A7EB-C662A26C96D7}"/>
               </a:ext>
             </a:extLst>
           </p:cNvPr>
@@ -2105,7 +2100,7 @@
           <p:cNvPr id="4" name="Slide Number Placeholder 3">
             <a:extLst>
               <a:ext uri="{FF2B5EF4-FFF2-40B4-BE49-F238E27FC236}">
-                <a16:creationId xmlns:a16="http://schemas.microsoft.com/office/drawing/2014/main" id="{E99E7BA9-71D3-5C4F-9CB3-B7EDF2FCE932}"/>
+                <a16:creationId xmlns:a16="http://schemas.microsoft.com/office/drawing/2014/main" id="{20535D17-545A-1F4E-B672-992DA66BE490}"/>
               </a:ext>
             </a:extLst>
           </p:cNvPr>
@@ -2121,7 +2116,7 @@
           <a:bodyPr/>
           <a:lstStyle/>
           <a:p>
-            <a:fld id="{6B9C629E-BD08-6D40-8232-1E3354C6533C}" type="slidenum">
+            <a:fld id="{1103B449-CEA9-4E4E-B4BD-0814C863F564}" type="slidenum">
               <a:rPr lang="en-US" smtClean="0"/>
               <a:t>‹#›</a:t>
             </a:fld>
@@ -2132,7 +2127,7 @@
     </p:spTree>
     <p:extLst>
       <p:ext uri="{BB962C8B-B14F-4D97-AF65-F5344CB8AC3E}">
-        <p14:creationId xmlns:p14="http://schemas.microsoft.com/office/powerpoint/2010/main" val="4073239830"/>
+        <p14:creationId xmlns:p14="http://schemas.microsoft.com/office/powerpoint/2010/main" val="508523919"/>
       </p:ext>
     </p:extLst>
   </p:cSld>
@@ -2164,7 +2159,7 @@
           <p:cNvPr id="2" name="Title 1">
             <a:extLst>
               <a:ext uri="{FF2B5EF4-FFF2-40B4-BE49-F238E27FC236}">
-                <a16:creationId xmlns:a16="http://schemas.microsoft.com/office/drawing/2014/main" id="{1E1B66E0-0DC0-1447-B6EC-F8F277B5FE2F}"/>
+                <a16:creationId xmlns:a16="http://schemas.microsoft.com/office/drawing/2014/main" id="{C6652361-2633-CE42-AB17-4E7B0F217F74}"/>
               </a:ext>
             </a:extLst>
           </p:cNvPr>
@@ -2201,7 +2196,7 @@
           <p:cNvPr id="3" name="Content Placeholder 2">
             <a:extLst>
               <a:ext uri="{FF2B5EF4-FFF2-40B4-BE49-F238E27FC236}">
-                <a16:creationId xmlns:a16="http://schemas.microsoft.com/office/drawing/2014/main" id="{D2838185-3ABA-4B4D-BE6B-E3FAF7750440}"/>
+                <a16:creationId xmlns:a16="http://schemas.microsoft.com/office/drawing/2014/main" id="{43B4DE04-7D5F-3A4D-9FA2-6AE68EF8DC84}"/>
               </a:ext>
             </a:extLst>
           </p:cNvPr>
@@ -2291,7 +2286,7 @@
           <p:cNvPr id="4" name="Text Placeholder 3">
             <a:extLst>
               <a:ext uri="{FF2B5EF4-FFF2-40B4-BE49-F238E27FC236}">
-                <a16:creationId xmlns:a16="http://schemas.microsoft.com/office/drawing/2014/main" id="{368E3A4B-95C8-B245-9727-85DD18A6F8F9}"/>
+                <a16:creationId xmlns:a16="http://schemas.microsoft.com/office/drawing/2014/main" id="{1D1F6A2F-4BC3-1047-B360-7D8F487846BB}"/>
               </a:ext>
             </a:extLst>
           </p:cNvPr>
@@ -2362,7 +2357,7 @@
           <p:cNvPr id="5" name="Date Placeholder 4">
             <a:extLst>
               <a:ext uri="{FF2B5EF4-FFF2-40B4-BE49-F238E27FC236}">
-                <a16:creationId xmlns:a16="http://schemas.microsoft.com/office/drawing/2014/main" id="{29060E19-D737-E54A-ABC1-678F78BD89AE}"/>
+                <a16:creationId xmlns:a16="http://schemas.microsoft.com/office/drawing/2014/main" id="{4212DFEC-1430-D44D-BECF-6AFFC2DFB20C}"/>
               </a:ext>
             </a:extLst>
           </p:cNvPr>
@@ -2378,9 +2373,9 @@
           <a:bodyPr/>
           <a:lstStyle/>
           <a:p>
-            <a:fld id="{E3E846BE-4134-2044-B985-FB81F4ED91A7}" type="datetimeFigureOut">
+            <a:fld id="{A49347D3-74BA-2B44-8B5C-74FF05953E33}" type="datetimeFigureOut">
               <a:rPr lang="en-US" smtClean="0"/>
-              <a:t>1/11/21</a:t>
+              <a:t>1/19/21</a:t>
             </a:fld>
             <a:endParaRPr lang="en-US"/>
           </a:p>
@@ -2391,7 +2386,7 @@
           <p:cNvPr id="6" name="Footer Placeholder 5">
             <a:extLst>
               <a:ext uri="{FF2B5EF4-FFF2-40B4-BE49-F238E27FC236}">
-                <a16:creationId xmlns:a16="http://schemas.microsoft.com/office/drawing/2014/main" id="{1CD2F785-B2D2-574D-A6BA-CE32896F7413}"/>
+                <a16:creationId xmlns:a16="http://schemas.microsoft.com/office/drawing/2014/main" id="{A9B12568-D9CF-2E46-9B88-6C5AEE39B3A3}"/>
               </a:ext>
             </a:extLst>
           </p:cNvPr>
@@ -2416,7 +2411,7 @@
           <p:cNvPr id="7" name="Slide Number Placeholder 6">
             <a:extLst>
               <a:ext uri="{FF2B5EF4-FFF2-40B4-BE49-F238E27FC236}">
-                <a16:creationId xmlns:a16="http://schemas.microsoft.com/office/drawing/2014/main" id="{5077D492-82FB-6145-9EFD-97FA74FD2926}"/>
+                <a16:creationId xmlns:a16="http://schemas.microsoft.com/office/drawing/2014/main" id="{DFA706A1-62A1-9440-B438-27AE1204638D}"/>
               </a:ext>
             </a:extLst>
           </p:cNvPr>
@@ -2432,7 +2427,7 @@
           <a:bodyPr/>
           <a:lstStyle/>
           <a:p>
-            <a:fld id="{6B9C629E-BD08-6D40-8232-1E3354C6533C}" type="slidenum">
+            <a:fld id="{1103B449-CEA9-4E4E-B4BD-0814C863F564}" type="slidenum">
               <a:rPr lang="en-US" smtClean="0"/>
               <a:t>‹#›</a:t>
             </a:fld>
@@ -2443,7 +2438,7 @@
     </p:spTree>
     <p:extLst>
       <p:ext uri="{BB962C8B-B14F-4D97-AF65-F5344CB8AC3E}">
-        <p14:creationId xmlns:p14="http://schemas.microsoft.com/office/powerpoint/2010/main" val="3320254901"/>
+        <p14:creationId xmlns:p14="http://schemas.microsoft.com/office/powerpoint/2010/main" val="3942499856"/>
       </p:ext>
     </p:extLst>
   </p:cSld>
@@ -2475,7 +2470,7 @@
           <p:cNvPr id="2" name="Title 1">
             <a:extLst>
               <a:ext uri="{FF2B5EF4-FFF2-40B4-BE49-F238E27FC236}">
-                <a16:creationId xmlns:a16="http://schemas.microsoft.com/office/drawing/2014/main" id="{CFBBDDF9-1258-1A41-B49B-51E423630C5D}"/>
+                <a16:creationId xmlns:a16="http://schemas.microsoft.com/office/drawing/2014/main" id="{7D536960-9AAE-054E-8C53-7E565FC6ECF4}"/>
               </a:ext>
             </a:extLst>
           </p:cNvPr>
@@ -2512,7 +2507,7 @@
           <p:cNvPr id="3" name="Picture Placeholder 2">
             <a:extLst>
               <a:ext uri="{FF2B5EF4-FFF2-40B4-BE49-F238E27FC236}">
-                <a16:creationId xmlns:a16="http://schemas.microsoft.com/office/drawing/2014/main" id="{15B40F1B-A8EA-6F4A-BB70-742E2D9DFA3D}"/>
+                <a16:creationId xmlns:a16="http://schemas.microsoft.com/office/drawing/2014/main" id="{C03176CD-BED0-384D-B126-39E471312B7C}"/>
               </a:ext>
             </a:extLst>
           </p:cNvPr>
@@ -2579,7 +2574,7 @@
           <p:cNvPr id="4" name="Text Placeholder 3">
             <a:extLst>
               <a:ext uri="{FF2B5EF4-FFF2-40B4-BE49-F238E27FC236}">
-                <a16:creationId xmlns:a16="http://schemas.microsoft.com/office/drawing/2014/main" id="{89E8D1EB-36D1-1143-A47F-478B77B95167}"/>
+                <a16:creationId xmlns:a16="http://schemas.microsoft.com/office/drawing/2014/main" id="{9093CE56-D166-0D44-BED2-9B8B571E3FC1}"/>
               </a:ext>
             </a:extLst>
           </p:cNvPr>
@@ -2650,7 +2645,7 @@
           <p:cNvPr id="5" name="Date Placeholder 4">
             <a:extLst>
               <a:ext uri="{FF2B5EF4-FFF2-40B4-BE49-F238E27FC236}">
-                <a16:creationId xmlns:a16="http://schemas.microsoft.com/office/drawing/2014/main" id="{8A897E2E-D487-7849-B565-25A26E3B08F1}"/>
+                <a16:creationId xmlns:a16="http://schemas.microsoft.com/office/drawing/2014/main" id="{BDF4A756-9782-874C-B66C-B86D9C658568}"/>
               </a:ext>
             </a:extLst>
           </p:cNvPr>
@@ -2666,9 +2661,9 @@
           <a:bodyPr/>
           <a:lstStyle/>
           <a:p>
-            <a:fld id="{E3E846BE-4134-2044-B985-FB81F4ED91A7}" type="datetimeFigureOut">
+            <a:fld id="{A49347D3-74BA-2B44-8B5C-74FF05953E33}" type="datetimeFigureOut">
               <a:rPr lang="en-US" smtClean="0"/>
-              <a:t>1/11/21</a:t>
+              <a:t>1/19/21</a:t>
             </a:fld>
             <a:endParaRPr lang="en-US"/>
           </a:p>
@@ -2679,7 +2674,7 @@
           <p:cNvPr id="6" name="Footer Placeholder 5">
             <a:extLst>
               <a:ext uri="{FF2B5EF4-FFF2-40B4-BE49-F238E27FC236}">
-                <a16:creationId xmlns:a16="http://schemas.microsoft.com/office/drawing/2014/main" id="{5ACE8884-19F7-2642-AED1-0ECC9D8665D4}"/>
+                <a16:creationId xmlns:a16="http://schemas.microsoft.com/office/drawing/2014/main" id="{4B46F3F2-5017-2849-86FB-E5D7A19FB654}"/>
               </a:ext>
             </a:extLst>
           </p:cNvPr>
@@ -2704,7 +2699,7 @@
           <p:cNvPr id="7" name="Slide Number Placeholder 6">
             <a:extLst>
               <a:ext uri="{FF2B5EF4-FFF2-40B4-BE49-F238E27FC236}">
-                <a16:creationId xmlns:a16="http://schemas.microsoft.com/office/drawing/2014/main" id="{AB655E9D-C1A4-034B-BAAB-33DF570ED0B5}"/>
+                <a16:creationId xmlns:a16="http://schemas.microsoft.com/office/drawing/2014/main" id="{14F67F0D-D30B-044D-BD8E-722418B40107}"/>
               </a:ext>
             </a:extLst>
           </p:cNvPr>
@@ -2720,7 +2715,7 @@
           <a:bodyPr/>
           <a:lstStyle/>
           <a:p>
-            <a:fld id="{6B9C629E-BD08-6D40-8232-1E3354C6533C}" type="slidenum">
+            <a:fld id="{1103B449-CEA9-4E4E-B4BD-0814C863F564}" type="slidenum">
               <a:rPr lang="en-US" smtClean="0"/>
               <a:t>‹#›</a:t>
             </a:fld>
@@ -2731,7 +2726,7 @@
     </p:spTree>
     <p:extLst>
       <p:ext uri="{BB962C8B-B14F-4D97-AF65-F5344CB8AC3E}">
-        <p14:creationId xmlns:p14="http://schemas.microsoft.com/office/powerpoint/2010/main" val="1478498027"/>
+        <p14:creationId xmlns:p14="http://schemas.microsoft.com/office/powerpoint/2010/main" val="2481030065"/>
       </p:ext>
     </p:extLst>
   </p:cSld>
@@ -2768,7 +2763,7 @@
           <p:cNvPr id="2" name="Title Placeholder 1">
             <a:extLst>
               <a:ext uri="{FF2B5EF4-FFF2-40B4-BE49-F238E27FC236}">
-                <a16:creationId xmlns:a16="http://schemas.microsoft.com/office/drawing/2014/main" id="{8A9E2C93-D5B5-544D-B17E-2423A07ED1B8}"/>
+                <a16:creationId xmlns:a16="http://schemas.microsoft.com/office/drawing/2014/main" id="{3F63F757-72CD-3041-81BD-0D95A29C46EA}"/>
               </a:ext>
             </a:extLst>
           </p:cNvPr>
@@ -2806,7 +2801,7 @@
           <p:cNvPr id="3" name="Text Placeholder 2">
             <a:extLst>
               <a:ext uri="{FF2B5EF4-FFF2-40B4-BE49-F238E27FC236}">
-                <a16:creationId xmlns:a16="http://schemas.microsoft.com/office/drawing/2014/main" id="{4F8172E5-5B25-EA49-879F-32F5B7498EA9}"/>
+                <a16:creationId xmlns:a16="http://schemas.microsoft.com/office/drawing/2014/main" id="{038317BA-4821-0A48-AE9F-F30526C85EAC}"/>
               </a:ext>
             </a:extLst>
           </p:cNvPr>
@@ -2873,7 +2868,7 @@
           <p:cNvPr id="4" name="Date Placeholder 3">
             <a:extLst>
               <a:ext uri="{FF2B5EF4-FFF2-40B4-BE49-F238E27FC236}">
-                <a16:creationId xmlns:a16="http://schemas.microsoft.com/office/drawing/2014/main" id="{4B420F19-65D1-5142-AFF3-DCCEFCDC0B6F}"/>
+                <a16:creationId xmlns:a16="http://schemas.microsoft.com/office/drawing/2014/main" id="{AAEA90D5-0FA7-1742-93AC-32ED17852842}"/>
               </a:ext>
             </a:extLst>
           </p:cNvPr>
@@ -2907,9 +2902,9 @@
             </a:lvl1pPr>
           </a:lstStyle>
           <a:p>
-            <a:fld id="{E3E846BE-4134-2044-B985-FB81F4ED91A7}" type="datetimeFigureOut">
+            <a:fld id="{A49347D3-74BA-2B44-8B5C-74FF05953E33}" type="datetimeFigureOut">
               <a:rPr lang="en-US" smtClean="0"/>
-              <a:t>1/11/21</a:t>
+              <a:t>1/19/21</a:t>
             </a:fld>
             <a:endParaRPr lang="en-US"/>
           </a:p>
@@ -2920,7 +2915,7 @@
           <p:cNvPr id="5" name="Footer Placeholder 4">
             <a:extLst>
               <a:ext uri="{FF2B5EF4-FFF2-40B4-BE49-F238E27FC236}">
-                <a16:creationId xmlns:a16="http://schemas.microsoft.com/office/drawing/2014/main" id="{6F00D6EA-91E1-8A4D-80C5-C90A6C08EDB4}"/>
+                <a16:creationId xmlns:a16="http://schemas.microsoft.com/office/drawing/2014/main" id="{16562FF3-2F80-8440-ABB4-78E45B23BF75}"/>
               </a:ext>
             </a:extLst>
           </p:cNvPr>
@@ -2963,7 +2958,7 @@
           <p:cNvPr id="6" name="Slide Number Placeholder 5">
             <a:extLst>
               <a:ext uri="{FF2B5EF4-FFF2-40B4-BE49-F238E27FC236}">
-                <a16:creationId xmlns:a16="http://schemas.microsoft.com/office/drawing/2014/main" id="{88830FDD-A1D8-934F-A255-BE1D108A3E72}"/>
+                <a16:creationId xmlns:a16="http://schemas.microsoft.com/office/drawing/2014/main" id="{A0AA2ACF-4113-1343-882B-38192FB51373}"/>
               </a:ext>
             </a:extLst>
           </p:cNvPr>
@@ -2997,7 +2992,7 @@
             </a:lvl1pPr>
           </a:lstStyle>
           <a:p>
-            <a:fld id="{6B9C629E-BD08-6D40-8232-1E3354C6533C}" type="slidenum">
+            <a:fld id="{1103B449-CEA9-4E4E-B4BD-0814C863F564}" type="slidenum">
               <a:rPr lang="en-US" smtClean="0"/>
               <a:t>‹#›</a:t>
             </a:fld>
@@ -3008,7 +3003,7 @@
     </p:spTree>
     <p:extLst>
       <p:ext uri="{BB962C8B-B14F-4D97-AF65-F5344CB8AC3E}">
-        <p14:creationId xmlns:p14="http://schemas.microsoft.com/office/powerpoint/2010/main" val="4040658059"/>
+        <p14:creationId xmlns:p14="http://schemas.microsoft.com/office/powerpoint/2010/main" val="1500539452"/>
       </p:ext>
     </p:extLst>
   </p:cSld>
@@ -3326,593 +3321,570 @@
           <a:chExt cx="0" cy="0"/>
         </a:xfrm>
       </p:grpSpPr>
-      <p:sp>
-        <p:nvSpPr>
-          <p:cNvPr id="4" name="Rectangle 3">
-            <a:extLst>
-              <a:ext uri="{FF2B5EF4-FFF2-40B4-BE49-F238E27FC236}">
-                <a16:creationId xmlns:a16="http://schemas.microsoft.com/office/drawing/2014/main" id="{3954A7E7-1C71-8448-85ED-6F2C04FEB614}"/>
-              </a:ext>
-            </a:extLst>
-          </p:cNvPr>
-          <p:cNvSpPr/>
+      <p:grpSp>
+        <p:nvGrpSpPr>
+          <p:cNvPr id="17" name="Group 16">
+            <a:extLst>
+              <a:ext uri="{FF2B5EF4-FFF2-40B4-BE49-F238E27FC236}">
+                <a16:creationId xmlns:a16="http://schemas.microsoft.com/office/drawing/2014/main" id="{107F89CC-E1EE-8643-A413-F3E719453930}"/>
+              </a:ext>
+            </a:extLst>
+          </p:cNvPr>
+          <p:cNvGrpSpPr/>
           <p:nvPr/>
-        </p:nvSpPr>
-        <p:spPr>
+        </p:nvGrpSpPr>
+        <p:grpSpPr>
           <a:xfrm>
-            <a:off x="1524000" y="2450473"/>
-            <a:ext cx="6400800" cy="531341"/>
+            <a:off x="1735707" y="795012"/>
+            <a:ext cx="6329112" cy="5295238"/>
+            <a:chOff x="1735707" y="795012"/>
+            <a:chExt cx="6329112" cy="5295238"/>
           </a:xfrm>
-          <a:prstGeom prst="rect">
-            <a:avLst/>
-          </a:prstGeom>
-          <a:noFill/>
-          <a:ln>
-            <a:solidFill>
+        </p:grpSpPr>
+        <p:pic>
+          <p:nvPicPr>
+            <p:cNvPr id="5" name="Picture 4" descr="Diagram&#10;&#10;Description automatically generated">
+              <a:extLst>
+                <a:ext uri="{FF2B5EF4-FFF2-40B4-BE49-F238E27FC236}">
+                  <a16:creationId xmlns:a16="http://schemas.microsoft.com/office/drawing/2014/main" id="{8DE25877-CA9D-8F45-8C79-01CB4A4946EF}"/>
+                </a:ext>
+              </a:extLst>
+            </p:cNvPr>
+            <p:cNvPicPr>
+              <a:picLocks noChangeAspect="1"/>
+            </p:cNvPicPr>
+            <p:nvPr/>
+          </p:nvPicPr>
+          <p:blipFill>
+            <a:blip r:embed="rId2"/>
+            <a:stretch>
+              <a:fillRect/>
+            </a:stretch>
+          </p:blipFill>
+          <p:spPr>
+            <a:xfrm>
+              <a:off x="1735707" y="2103408"/>
+              <a:ext cx="6329112" cy="3986842"/>
+            </a:xfrm>
+            <a:prstGeom prst="rect">
+              <a:avLst/>
+            </a:prstGeom>
+          </p:spPr>
+        </p:pic>
+        <p:cxnSp>
+          <p:nvCxnSpPr>
+            <p:cNvPr id="7" name="Straight Arrow Connector 6">
+              <a:extLst>
+                <a:ext uri="{FF2B5EF4-FFF2-40B4-BE49-F238E27FC236}">
+                  <a16:creationId xmlns:a16="http://schemas.microsoft.com/office/drawing/2014/main" id="{2A837D20-E0D8-4248-B8A4-032B15A0125D}"/>
+                </a:ext>
+              </a:extLst>
+            </p:cNvPr>
+            <p:cNvCxnSpPr>
+              <a:cxnSpLocks/>
+            </p:cNvCxnSpPr>
+            <p:nvPr/>
+          </p:nvCxnSpPr>
+          <p:spPr>
+            <a:xfrm>
+              <a:off x="4796747" y="1526876"/>
+              <a:ext cx="0" cy="559280"/>
+            </a:xfrm>
+            <a:prstGeom prst="straightConnector1">
+              <a:avLst/>
+            </a:prstGeom>
+            <a:ln w="76200">
+              <a:solidFill>
+                <a:srgbClr val="323232"/>
+              </a:solidFill>
+              <a:tailEnd type="triangle"/>
+            </a:ln>
+          </p:spPr>
+          <p:style>
+            <a:lnRef idx="1">
+              <a:schemeClr val="dk1"/>
+            </a:lnRef>
+            <a:fillRef idx="0">
+              <a:schemeClr val="dk1"/>
+            </a:fillRef>
+            <a:effectRef idx="0">
+              <a:schemeClr val="dk1"/>
+            </a:effectRef>
+            <a:fontRef idx="minor">
               <a:schemeClr val="tx1"/>
-            </a:solidFill>
-          </a:ln>
-        </p:spPr>
-        <p:style>
-          <a:lnRef idx="2">
-            <a:schemeClr val="accent1">
-              <a:shade val="50000"/>
-            </a:schemeClr>
-          </a:lnRef>
-          <a:fillRef idx="1">
-            <a:schemeClr val="accent1"/>
-          </a:fillRef>
-          <a:effectRef idx="0">
-            <a:schemeClr val="accent1"/>
-          </a:effectRef>
-          <a:fontRef idx="minor">
-            <a:schemeClr val="lt1"/>
-          </a:fontRef>
-        </p:style>
-        <p:txBody>
-          <a:bodyPr rtlCol="0" anchor="ctr"/>
-          <a:lstStyle/>
-          <a:p>
-            <a:pPr algn="ctr"/>
-            <a:endParaRPr lang="en-US"/>
-          </a:p>
-        </p:txBody>
-      </p:sp>
-      <p:sp>
-        <p:nvSpPr>
-          <p:cNvPr id="5" name="Rectangle 4">
-            <a:extLst>
-              <a:ext uri="{FF2B5EF4-FFF2-40B4-BE49-F238E27FC236}">
-                <a16:creationId xmlns:a16="http://schemas.microsoft.com/office/drawing/2014/main" id="{38C1CEAE-7808-C741-A3C3-97E3E4E76537}"/>
-              </a:ext>
-            </a:extLst>
-          </p:cNvPr>
-          <p:cNvSpPr/>
-          <p:nvPr/>
-        </p:nvSpPr>
-        <p:spPr>
-          <a:xfrm>
-            <a:off x="1523999" y="2450473"/>
-            <a:ext cx="746233" cy="531341"/>
-          </a:xfrm>
-          <a:prstGeom prst="rect">
-            <a:avLst/>
-          </a:prstGeom>
-          <a:noFill/>
-          <a:ln>
-            <a:solidFill>
-              <a:schemeClr val="tx1"/>
-            </a:solidFill>
-          </a:ln>
-        </p:spPr>
-        <p:style>
-          <a:lnRef idx="2">
-            <a:schemeClr val="accent1">
-              <a:shade val="50000"/>
-            </a:schemeClr>
-          </a:lnRef>
-          <a:fillRef idx="1">
-            <a:schemeClr val="accent1"/>
-          </a:fillRef>
-          <a:effectRef idx="0">
-            <a:schemeClr val="accent1"/>
-          </a:effectRef>
-          <a:fontRef idx="minor">
-            <a:schemeClr val="lt1"/>
-          </a:fontRef>
-        </p:style>
-        <p:txBody>
-          <a:bodyPr rtlCol="0" anchor="ctr"/>
-          <a:lstStyle/>
-          <a:p>
-            <a:pPr algn="ctr"/>
-            <a:r>
-              <a:rPr lang="en-US" altLang="zh-CN" sz="1600" dirty="0">
-                <a:solidFill>
-                  <a:schemeClr val="tx1"/>
-                </a:solidFill>
-                <a:latin typeface="Times New Roman" panose="02020603050405020304" pitchFamily="18" charset="0"/>
-                <a:cs typeface="Times New Roman" panose="02020603050405020304" pitchFamily="18" charset="0"/>
-              </a:rPr>
-              <a:t>test</a:t>
-            </a:r>
-            <a:r>
-              <a:rPr lang="zh-CN" altLang="en-US" sz="1600" dirty="0">
-                <a:solidFill>
-                  <a:schemeClr val="tx1"/>
-                </a:solidFill>
-                <a:latin typeface="Times New Roman" panose="02020603050405020304" pitchFamily="18" charset="0"/>
-                <a:cs typeface="Times New Roman" panose="02020603050405020304" pitchFamily="18" charset="0"/>
-              </a:rPr>
-              <a:t> </a:t>
-            </a:r>
-            <a:r>
-              <a:rPr lang="en-US" altLang="zh-CN" sz="1600" dirty="0">
-                <a:solidFill>
-                  <a:schemeClr val="tx1"/>
-                </a:solidFill>
-                <a:latin typeface="Times New Roman" panose="02020603050405020304" pitchFamily="18" charset="0"/>
-                <a:cs typeface="Times New Roman" panose="02020603050405020304" pitchFamily="18" charset="0"/>
-              </a:rPr>
-              <a:t>set</a:t>
-            </a:r>
-            <a:endParaRPr lang="en-US" sz="1600" dirty="0">
+            </a:fontRef>
+          </p:style>
+        </p:cxnSp>
+        <p:sp>
+          <p:nvSpPr>
+            <p:cNvPr id="9" name="Rectangle 8">
+              <a:extLst>
+                <a:ext uri="{FF2B5EF4-FFF2-40B4-BE49-F238E27FC236}">
+                  <a16:creationId xmlns:a16="http://schemas.microsoft.com/office/drawing/2014/main" id="{69153416-2522-324B-9674-262364E664FD}"/>
+                </a:ext>
+              </a:extLst>
+            </p:cNvPr>
+            <p:cNvSpPr/>
+            <p:nvPr/>
+          </p:nvSpPr>
+          <p:spPr>
+            <a:xfrm>
+              <a:off x="4010881" y="795012"/>
+              <a:ext cx="1554480" cy="685912"/>
+            </a:xfrm>
+            <a:prstGeom prst="rect">
+              <a:avLst/>
+            </a:prstGeom>
+            <a:noFill/>
+            <a:ln w="19050">
               <a:solidFill>
                 <a:schemeClr val="tx1"/>
               </a:solidFill>
-              <a:latin typeface="Times New Roman" panose="02020603050405020304" pitchFamily="18" charset="0"/>
-              <a:cs typeface="Times New Roman" panose="02020603050405020304" pitchFamily="18" charset="0"/>
-            </a:endParaRPr>
-          </a:p>
-        </p:txBody>
-      </p:sp>
-      <p:sp>
-        <p:nvSpPr>
-          <p:cNvPr id="7" name="Rectangle 6">
-            <a:extLst>
-              <a:ext uri="{FF2B5EF4-FFF2-40B4-BE49-F238E27FC236}">
-                <a16:creationId xmlns:a16="http://schemas.microsoft.com/office/drawing/2014/main" id="{047338B5-EDE9-AA4D-897D-8853E46AED13}"/>
-              </a:ext>
-            </a:extLst>
-          </p:cNvPr>
-          <p:cNvSpPr/>
-          <p:nvPr/>
-        </p:nvSpPr>
-        <p:spPr>
-          <a:xfrm>
-            <a:off x="2270234" y="2446621"/>
-            <a:ext cx="1166649" cy="531341"/>
-          </a:xfrm>
-          <a:prstGeom prst="rect">
-            <a:avLst/>
-          </a:prstGeom>
-          <a:noFill/>
-          <a:ln>
+            </a:ln>
+          </p:spPr>
+          <p:style>
+            <a:lnRef idx="2">
+              <a:schemeClr val="accent1">
+                <a:shade val="50000"/>
+              </a:schemeClr>
+            </a:lnRef>
+            <a:fillRef idx="1">
+              <a:schemeClr val="accent1"/>
+            </a:fillRef>
+            <a:effectRef idx="0">
+              <a:schemeClr val="accent1"/>
+            </a:effectRef>
+            <a:fontRef idx="minor">
+              <a:schemeClr val="lt1"/>
+            </a:fontRef>
+          </p:style>
+          <p:txBody>
+            <a:bodyPr rtlCol="0" anchor="ctr"/>
+            <a:lstStyle/>
+            <a:p>
+              <a:pPr algn="ctr"/>
+              <a:r>
+                <a:rPr lang="en-US" sz="1500" dirty="0">
+                  <a:solidFill>
+                    <a:schemeClr val="tx1"/>
+                  </a:solidFill>
+                  <a:latin typeface="Times New Roman" panose="02020603050405020304" pitchFamily="18" charset="0"/>
+                  <a:cs typeface="Times New Roman" panose="02020603050405020304" pitchFamily="18" charset="0"/>
+                </a:rPr>
+                <a:t>Initial Model</a:t>
+              </a:r>
+            </a:p>
+          </p:txBody>
+        </p:sp>
+        <p:sp>
+          <p:nvSpPr>
+            <p:cNvPr id="11" name="Rectangle 10">
+              <a:extLst>
+                <a:ext uri="{FF2B5EF4-FFF2-40B4-BE49-F238E27FC236}">
+                  <a16:creationId xmlns:a16="http://schemas.microsoft.com/office/drawing/2014/main" id="{8CC3262D-A109-904D-B170-C4C01F507234}"/>
+                </a:ext>
+              </a:extLst>
+            </p:cNvPr>
+            <p:cNvSpPr/>
+            <p:nvPr/>
+          </p:nvSpPr>
+          <p:spPr>
+            <a:xfrm>
+              <a:off x="4045789" y="2163792"/>
+              <a:ext cx="1440611" cy="751935"/>
+            </a:xfrm>
+            <a:prstGeom prst="rect">
+              <a:avLst/>
+            </a:prstGeom>
             <a:solidFill>
-              <a:schemeClr val="tx1"/>
+              <a:schemeClr val="bg1"/>
             </a:solidFill>
-          </a:ln>
-        </p:spPr>
-        <p:style>
-          <a:lnRef idx="2">
-            <a:schemeClr val="accent1">
-              <a:shade val="50000"/>
-            </a:schemeClr>
-          </a:lnRef>
-          <a:fillRef idx="1">
-            <a:schemeClr val="accent1"/>
-          </a:fillRef>
-          <a:effectRef idx="0">
-            <a:schemeClr val="accent1"/>
-          </a:effectRef>
-          <a:fontRef idx="minor">
-            <a:schemeClr val="lt1"/>
-          </a:fontRef>
-        </p:style>
-        <p:txBody>
-          <a:bodyPr rtlCol="0" anchor="ctr"/>
-          <a:lstStyle/>
-          <a:p>
-            <a:pPr algn="ctr"/>
-            <a:r>
-              <a:rPr lang="en-US" altLang="zh-CN" sz="1600" dirty="0">
-                <a:solidFill>
-                  <a:schemeClr val="tx1"/>
-                </a:solidFill>
-                <a:latin typeface="Times New Roman" panose="02020603050405020304" pitchFamily="18" charset="0"/>
-                <a:cs typeface="Times New Roman" panose="02020603050405020304" pitchFamily="18" charset="0"/>
-              </a:rPr>
-              <a:t>training</a:t>
-            </a:r>
-            <a:r>
-              <a:rPr lang="zh-CN" altLang="en-US" sz="1600" dirty="0">
-                <a:solidFill>
-                  <a:schemeClr val="tx1"/>
-                </a:solidFill>
-                <a:latin typeface="Times New Roman" panose="02020603050405020304" pitchFamily="18" charset="0"/>
-                <a:cs typeface="Times New Roman" panose="02020603050405020304" pitchFamily="18" charset="0"/>
-              </a:rPr>
-              <a:t> </a:t>
-            </a:r>
-            <a:r>
-              <a:rPr lang="en-US" altLang="zh-CN" sz="1600" dirty="0">
-                <a:solidFill>
-                  <a:schemeClr val="tx1"/>
-                </a:solidFill>
-                <a:latin typeface="Times New Roman" panose="02020603050405020304" pitchFamily="18" charset="0"/>
-                <a:cs typeface="Times New Roman" panose="02020603050405020304" pitchFamily="18" charset="0"/>
-              </a:rPr>
-              <a:t>set</a:t>
-            </a:r>
-            <a:endParaRPr lang="en-US" sz="1600" dirty="0">
+            <a:ln>
               <a:solidFill>
-                <a:schemeClr val="tx1"/>
+                <a:schemeClr val="bg1"/>
               </a:solidFill>
-              <a:latin typeface="Times New Roman" panose="02020603050405020304" pitchFamily="18" charset="0"/>
-              <a:cs typeface="Times New Roman" panose="02020603050405020304" pitchFamily="18" charset="0"/>
-            </a:endParaRPr>
-          </a:p>
-        </p:txBody>
-      </p:sp>
-      <p:sp>
-        <p:nvSpPr>
-          <p:cNvPr id="8" name="Rectangle 7">
-            <a:extLst>
-              <a:ext uri="{FF2B5EF4-FFF2-40B4-BE49-F238E27FC236}">
-                <a16:creationId xmlns:a16="http://schemas.microsoft.com/office/drawing/2014/main" id="{CDE2E762-C332-BB4F-B470-F64AF205D68F}"/>
-              </a:ext>
-            </a:extLst>
-          </p:cNvPr>
-          <p:cNvSpPr/>
-          <p:nvPr/>
-        </p:nvSpPr>
-        <p:spPr>
-          <a:xfrm>
-            <a:off x="3436882" y="2450473"/>
-            <a:ext cx="4487917" cy="531341"/>
-          </a:xfrm>
-          <a:prstGeom prst="rect">
-            <a:avLst/>
-          </a:prstGeom>
-          <a:noFill/>
-          <a:ln>
+            </a:ln>
+          </p:spPr>
+          <p:style>
+            <a:lnRef idx="2">
+              <a:schemeClr val="accent1">
+                <a:shade val="50000"/>
+              </a:schemeClr>
+            </a:lnRef>
+            <a:fillRef idx="1">
+              <a:schemeClr val="accent1"/>
+            </a:fillRef>
+            <a:effectRef idx="0">
+              <a:schemeClr val="accent1"/>
+            </a:effectRef>
+            <a:fontRef idx="minor">
+              <a:schemeClr val="lt1"/>
+            </a:fontRef>
+          </p:style>
+          <p:txBody>
+            <a:bodyPr rtlCol="0" anchor="ctr"/>
+            <a:lstStyle/>
+            <a:p>
+              <a:pPr algn="ctr"/>
+              <a:r>
+                <a:rPr lang="en-US" sz="1500" dirty="0">
+                  <a:solidFill>
+                    <a:schemeClr val="tx1"/>
+                  </a:solidFill>
+                  <a:latin typeface="Times New Roman" panose="02020603050405020304" pitchFamily="18" charset="0"/>
+                  <a:cs typeface="Times New Roman" panose="02020603050405020304" pitchFamily="18" charset="0"/>
+                </a:rPr>
+                <a:t>Supervised Learning Model</a:t>
+              </a:r>
+            </a:p>
+          </p:txBody>
+        </p:sp>
+        <p:sp>
+          <p:nvSpPr>
+            <p:cNvPr id="12" name="Rectangle 11">
+              <a:extLst>
+                <a:ext uri="{FF2B5EF4-FFF2-40B4-BE49-F238E27FC236}">
+                  <a16:creationId xmlns:a16="http://schemas.microsoft.com/office/drawing/2014/main" id="{06D28142-A74B-0C46-A05C-79AD3211544A}"/>
+                </a:ext>
+              </a:extLst>
+            </p:cNvPr>
+            <p:cNvSpPr/>
+            <p:nvPr/>
+          </p:nvSpPr>
+          <p:spPr>
+            <a:xfrm>
+              <a:off x="6406552" y="3607997"/>
+              <a:ext cx="1296838" cy="751935"/>
+            </a:xfrm>
+            <a:prstGeom prst="rect">
+              <a:avLst/>
+            </a:prstGeom>
             <a:solidFill>
-              <a:schemeClr val="tx1"/>
+              <a:srgbClr val="E4E4E5"/>
             </a:solidFill>
-          </a:ln>
-        </p:spPr>
-        <p:style>
-          <a:lnRef idx="2">
-            <a:schemeClr val="accent1">
-              <a:shade val="50000"/>
-            </a:schemeClr>
-          </a:lnRef>
-          <a:fillRef idx="1">
-            <a:schemeClr val="accent1"/>
-          </a:fillRef>
-          <a:effectRef idx="0">
-            <a:schemeClr val="accent1"/>
-          </a:effectRef>
-          <a:fontRef idx="minor">
-            <a:schemeClr val="lt1"/>
-          </a:fontRef>
-        </p:style>
-        <p:txBody>
-          <a:bodyPr rtlCol="0" anchor="ctr"/>
-          <a:lstStyle/>
-          <a:p>
-            <a:pPr algn="ctr"/>
-            <a:r>
-              <a:rPr lang="en-US" altLang="zh-CN" sz="1600" dirty="0">
-                <a:solidFill>
-                  <a:schemeClr val="tx1"/>
-                </a:solidFill>
-                <a:latin typeface="Times New Roman" panose="02020603050405020304" pitchFamily="18" charset="0"/>
-                <a:cs typeface="Times New Roman" panose="02020603050405020304" pitchFamily="18" charset="0"/>
-              </a:rPr>
-              <a:t>query</a:t>
-            </a:r>
-            <a:r>
-              <a:rPr lang="zh-CN" altLang="en-US" sz="1600" dirty="0">
-                <a:solidFill>
-                  <a:schemeClr val="tx1"/>
-                </a:solidFill>
-                <a:latin typeface="Times New Roman" panose="02020603050405020304" pitchFamily="18" charset="0"/>
-                <a:cs typeface="Times New Roman" panose="02020603050405020304" pitchFamily="18" charset="0"/>
-              </a:rPr>
-              <a:t> </a:t>
-            </a:r>
-            <a:r>
-              <a:rPr lang="en-US" altLang="zh-CN" sz="1600" dirty="0">
-                <a:solidFill>
-                  <a:schemeClr val="tx1"/>
-                </a:solidFill>
-                <a:latin typeface="Times New Roman" panose="02020603050405020304" pitchFamily="18" charset="0"/>
-                <a:cs typeface="Times New Roman" panose="02020603050405020304" pitchFamily="18" charset="0"/>
-              </a:rPr>
-              <a:t>pool</a:t>
-            </a:r>
-            <a:endParaRPr lang="en-US" sz="1600" dirty="0">
+            <a:ln>
               <a:solidFill>
-                <a:schemeClr val="tx1"/>
+                <a:srgbClr val="E4E4E5"/>
               </a:solidFill>
-              <a:latin typeface="Times New Roman" panose="02020603050405020304" pitchFamily="18" charset="0"/>
-              <a:cs typeface="Times New Roman" panose="02020603050405020304" pitchFamily="18" charset="0"/>
-            </a:endParaRPr>
-          </a:p>
-        </p:txBody>
-      </p:sp>
-      <p:sp>
-        <p:nvSpPr>
-          <p:cNvPr id="9" name="Right Brace 8">
-            <a:extLst>
-              <a:ext uri="{FF2B5EF4-FFF2-40B4-BE49-F238E27FC236}">
-                <a16:creationId xmlns:a16="http://schemas.microsoft.com/office/drawing/2014/main" id="{6987FBA8-66F1-5C48-92DE-C027D0663876}"/>
-              </a:ext>
-            </a:extLst>
-          </p:cNvPr>
-          <p:cNvSpPr/>
-          <p:nvPr/>
-        </p:nvSpPr>
-        <p:spPr>
-          <a:xfrm rot="5400000">
-            <a:off x="1752599" y="2879837"/>
-            <a:ext cx="289034" cy="746232"/>
-          </a:xfrm>
-          <a:prstGeom prst="rightBrace">
-            <a:avLst>
-              <a:gd name="adj1" fmla="val 79091"/>
-              <a:gd name="adj2" fmla="val 50000"/>
-            </a:avLst>
-          </a:prstGeom>
-        </p:spPr>
-        <p:style>
-          <a:lnRef idx="1">
-            <a:schemeClr val="dk1"/>
-          </a:lnRef>
-          <a:fillRef idx="0">
-            <a:schemeClr val="dk1"/>
-          </a:fillRef>
-          <a:effectRef idx="0">
-            <a:schemeClr val="dk1"/>
-          </a:effectRef>
-          <a:fontRef idx="minor">
-            <a:schemeClr val="tx1"/>
-          </a:fontRef>
-        </p:style>
-        <p:txBody>
-          <a:bodyPr rtlCol="0" anchor="ctr"/>
-          <a:lstStyle/>
-          <a:p>
-            <a:pPr algn="ctr"/>
-            <a:endParaRPr lang="en-US"/>
-          </a:p>
-        </p:txBody>
-      </p:sp>
-      <p:sp>
-        <p:nvSpPr>
-          <p:cNvPr id="10" name="TextBox 9">
-            <a:extLst>
-              <a:ext uri="{FF2B5EF4-FFF2-40B4-BE49-F238E27FC236}">
-                <a16:creationId xmlns:a16="http://schemas.microsoft.com/office/drawing/2014/main" id="{2407AAE9-9669-384B-9E8C-10F9F4C6B261}"/>
-              </a:ext>
-            </a:extLst>
-          </p:cNvPr>
-          <p:cNvSpPr txBox="1"/>
-          <p:nvPr/>
-        </p:nvSpPr>
-        <p:spPr>
-          <a:xfrm>
-            <a:off x="1616429" y="3424653"/>
-            <a:ext cx="561372" cy="338554"/>
-          </a:xfrm>
-          <a:prstGeom prst="rect">
-            <a:avLst/>
-          </a:prstGeom>
-          <a:noFill/>
-        </p:spPr>
-        <p:txBody>
-          <a:bodyPr wrap="none" rtlCol="0">
-            <a:spAutoFit/>
-          </a:bodyPr>
-          <a:lstStyle/>
-          <a:p>
-            <a:r>
-              <a:rPr lang="en-US" altLang="zh-CN" sz="1600" dirty="0">
-                <a:latin typeface="Times New Roman" panose="02020603050405020304" pitchFamily="18" charset="0"/>
-                <a:cs typeface="Times New Roman" panose="02020603050405020304" pitchFamily="18" charset="0"/>
-              </a:rPr>
-              <a:t>10%</a:t>
-            </a:r>
-            <a:endParaRPr lang="en-US" sz="1600" dirty="0">
-              <a:latin typeface="Times New Roman" panose="02020603050405020304" pitchFamily="18" charset="0"/>
-              <a:cs typeface="Times New Roman" panose="02020603050405020304" pitchFamily="18" charset="0"/>
-            </a:endParaRPr>
-          </a:p>
-        </p:txBody>
-      </p:sp>
-      <p:sp>
-        <p:nvSpPr>
-          <p:cNvPr id="11" name="Right Brace 10">
-            <a:extLst>
-              <a:ext uri="{FF2B5EF4-FFF2-40B4-BE49-F238E27FC236}">
-                <a16:creationId xmlns:a16="http://schemas.microsoft.com/office/drawing/2014/main" id="{2D75A5A9-F551-E14C-B24C-58E1E6636F8D}"/>
-              </a:ext>
-            </a:extLst>
-          </p:cNvPr>
-          <p:cNvSpPr/>
-          <p:nvPr/>
-        </p:nvSpPr>
-        <p:spPr>
-          <a:xfrm rot="5400000">
-            <a:off x="2709039" y="2683671"/>
-            <a:ext cx="289034" cy="1166650"/>
-          </a:xfrm>
-          <a:prstGeom prst="rightBrace">
-            <a:avLst>
-              <a:gd name="adj1" fmla="val 79091"/>
-              <a:gd name="adj2" fmla="val 50000"/>
-            </a:avLst>
-          </a:prstGeom>
-        </p:spPr>
-        <p:style>
-          <a:lnRef idx="1">
-            <a:schemeClr val="dk1"/>
-          </a:lnRef>
-          <a:fillRef idx="0">
-            <a:schemeClr val="dk1"/>
-          </a:fillRef>
-          <a:effectRef idx="0">
-            <a:schemeClr val="dk1"/>
-          </a:effectRef>
-          <a:fontRef idx="minor">
-            <a:schemeClr val="tx1"/>
-          </a:fontRef>
-        </p:style>
-        <p:txBody>
-          <a:bodyPr rtlCol="0" anchor="ctr"/>
-          <a:lstStyle/>
-          <a:p>
-            <a:pPr algn="ctr"/>
-            <a:endParaRPr lang="en-US"/>
-          </a:p>
-        </p:txBody>
-      </p:sp>
-      <p:sp>
-        <p:nvSpPr>
-          <p:cNvPr id="12" name="TextBox 11">
-            <a:extLst>
-              <a:ext uri="{FF2B5EF4-FFF2-40B4-BE49-F238E27FC236}">
-                <a16:creationId xmlns:a16="http://schemas.microsoft.com/office/drawing/2014/main" id="{947AD3A3-02D9-AA45-B035-02E22348F2BA}"/>
-              </a:ext>
-            </a:extLst>
-          </p:cNvPr>
-          <p:cNvSpPr txBox="1"/>
-          <p:nvPr/>
-        </p:nvSpPr>
-        <p:spPr>
-          <a:xfrm>
-            <a:off x="2572870" y="3423407"/>
-            <a:ext cx="561372" cy="338554"/>
-          </a:xfrm>
-          <a:prstGeom prst="rect">
-            <a:avLst/>
-          </a:prstGeom>
-          <a:noFill/>
-        </p:spPr>
-        <p:txBody>
-          <a:bodyPr wrap="none" rtlCol="0">
-            <a:spAutoFit/>
-          </a:bodyPr>
-          <a:lstStyle/>
-          <a:p>
-            <a:r>
-              <a:rPr lang="en-US" altLang="zh-CN" sz="1600" dirty="0">
-                <a:latin typeface="Times New Roman" panose="02020603050405020304" pitchFamily="18" charset="0"/>
-                <a:cs typeface="Times New Roman" panose="02020603050405020304" pitchFamily="18" charset="0"/>
-              </a:rPr>
-              <a:t>18%</a:t>
-            </a:r>
-            <a:endParaRPr lang="en-US" sz="1600" dirty="0">
-              <a:latin typeface="Times New Roman" panose="02020603050405020304" pitchFamily="18" charset="0"/>
-              <a:cs typeface="Times New Roman" panose="02020603050405020304" pitchFamily="18" charset="0"/>
-            </a:endParaRPr>
-          </a:p>
-        </p:txBody>
-      </p:sp>
-      <p:sp>
-        <p:nvSpPr>
-          <p:cNvPr id="13" name="Right Brace 12">
-            <a:extLst>
-              <a:ext uri="{FF2B5EF4-FFF2-40B4-BE49-F238E27FC236}">
-                <a16:creationId xmlns:a16="http://schemas.microsoft.com/office/drawing/2014/main" id="{4747342B-60E7-C14D-B14C-98EA97C325F4}"/>
-              </a:ext>
-            </a:extLst>
-          </p:cNvPr>
-          <p:cNvSpPr/>
-          <p:nvPr/>
-        </p:nvSpPr>
-        <p:spPr>
-          <a:xfrm rot="5400000">
-            <a:off x="5536323" y="1011144"/>
-            <a:ext cx="289034" cy="4487919"/>
-          </a:xfrm>
-          <a:prstGeom prst="rightBrace">
-            <a:avLst>
-              <a:gd name="adj1" fmla="val 79091"/>
-              <a:gd name="adj2" fmla="val 50000"/>
-            </a:avLst>
-          </a:prstGeom>
-        </p:spPr>
-        <p:style>
-          <a:lnRef idx="1">
-            <a:schemeClr val="dk1"/>
-          </a:lnRef>
-          <a:fillRef idx="0">
-            <a:schemeClr val="dk1"/>
-          </a:fillRef>
-          <a:effectRef idx="0">
-            <a:schemeClr val="dk1"/>
-          </a:effectRef>
-          <a:fontRef idx="minor">
-            <a:schemeClr val="tx1"/>
-          </a:fontRef>
-        </p:style>
-        <p:txBody>
-          <a:bodyPr rtlCol="0" anchor="ctr"/>
-          <a:lstStyle/>
-          <a:p>
-            <a:pPr algn="ctr"/>
-            <a:endParaRPr lang="en-US"/>
-          </a:p>
-        </p:txBody>
-      </p:sp>
-      <p:sp>
-        <p:nvSpPr>
-          <p:cNvPr id="14" name="TextBox 13">
-            <a:extLst>
-              <a:ext uri="{FF2B5EF4-FFF2-40B4-BE49-F238E27FC236}">
-                <a16:creationId xmlns:a16="http://schemas.microsoft.com/office/drawing/2014/main" id="{FF335850-6061-9E4B-BD3A-B64D7124084F}"/>
-              </a:ext>
-            </a:extLst>
-          </p:cNvPr>
-          <p:cNvSpPr txBox="1"/>
-          <p:nvPr/>
-        </p:nvSpPr>
-        <p:spPr>
-          <a:xfrm>
-            <a:off x="5400154" y="3411514"/>
-            <a:ext cx="561372" cy="338554"/>
-          </a:xfrm>
-          <a:prstGeom prst="rect">
-            <a:avLst/>
-          </a:prstGeom>
-          <a:noFill/>
-        </p:spPr>
-        <p:txBody>
-          <a:bodyPr wrap="square" rtlCol="0">
-            <a:spAutoFit/>
-          </a:bodyPr>
-          <a:lstStyle/>
-          <a:p>
-            <a:r>
-              <a:rPr lang="en-US" altLang="zh-CN" sz="1600" dirty="0">
-                <a:latin typeface="Times New Roman" panose="02020603050405020304" pitchFamily="18" charset="0"/>
-                <a:cs typeface="Times New Roman" panose="02020603050405020304" pitchFamily="18" charset="0"/>
-              </a:rPr>
-              <a:t>72%</a:t>
-            </a:r>
-            <a:endParaRPr lang="en-US" sz="1600" dirty="0">
-              <a:latin typeface="Times New Roman" panose="02020603050405020304" pitchFamily="18" charset="0"/>
-              <a:cs typeface="Times New Roman" panose="02020603050405020304" pitchFamily="18" charset="0"/>
-            </a:endParaRPr>
-          </a:p>
-        </p:txBody>
-      </p:sp>
+            </a:ln>
+          </p:spPr>
+          <p:style>
+            <a:lnRef idx="2">
+              <a:schemeClr val="accent1">
+                <a:shade val="50000"/>
+              </a:schemeClr>
+            </a:lnRef>
+            <a:fillRef idx="1">
+              <a:schemeClr val="accent1"/>
+            </a:fillRef>
+            <a:effectRef idx="0">
+              <a:schemeClr val="accent1"/>
+            </a:effectRef>
+            <a:fontRef idx="minor">
+              <a:schemeClr val="lt1"/>
+            </a:fontRef>
+          </p:style>
+          <p:txBody>
+            <a:bodyPr rtlCol="0" anchor="ctr"/>
+            <a:lstStyle/>
+            <a:p>
+              <a:pPr algn="ctr"/>
+              <a:r>
+                <a:rPr lang="en-US" sz="1500" dirty="0">
+                  <a:solidFill>
+                    <a:schemeClr val="tx1"/>
+                  </a:solidFill>
+                  <a:latin typeface="Times New Roman" panose="02020603050405020304" pitchFamily="18" charset="0"/>
+                  <a:cs typeface="Times New Roman" panose="02020603050405020304" pitchFamily="18" charset="0"/>
+                </a:rPr>
+                <a:t>Unlabeled</a:t>
+              </a:r>
+            </a:p>
+            <a:p>
+              <a:pPr algn="ctr"/>
+              <a:r>
+                <a:rPr lang="en-US" sz="1500" dirty="0">
+                  <a:solidFill>
+                    <a:schemeClr val="tx1"/>
+                  </a:solidFill>
+                  <a:latin typeface="Times New Roman" panose="02020603050405020304" pitchFamily="18" charset="0"/>
+                  <a:cs typeface="Times New Roman" panose="02020603050405020304" pitchFamily="18" charset="0"/>
+                </a:rPr>
+                <a:t>Data Pool</a:t>
+              </a:r>
+            </a:p>
+          </p:txBody>
+        </p:sp>
+        <p:sp>
+          <p:nvSpPr>
+            <p:cNvPr id="13" name="Rectangle 12">
+              <a:extLst>
+                <a:ext uri="{FF2B5EF4-FFF2-40B4-BE49-F238E27FC236}">
+                  <a16:creationId xmlns:a16="http://schemas.microsoft.com/office/drawing/2014/main" id="{F944C7C1-B92D-4C49-B7E0-1211DF770BB6}"/>
+                </a:ext>
+              </a:extLst>
+            </p:cNvPr>
+            <p:cNvSpPr/>
+            <p:nvPr/>
+          </p:nvSpPr>
+          <p:spPr>
+            <a:xfrm>
+              <a:off x="4188583" y="5477772"/>
+              <a:ext cx="1133915" cy="585216"/>
+            </a:xfrm>
+            <a:prstGeom prst="rect">
+              <a:avLst/>
+            </a:prstGeom>
+            <a:solidFill>
+              <a:schemeClr val="bg1"/>
+            </a:solidFill>
+            <a:ln>
+              <a:solidFill>
+                <a:schemeClr val="bg1"/>
+              </a:solidFill>
+            </a:ln>
+          </p:spPr>
+          <p:style>
+            <a:lnRef idx="2">
+              <a:schemeClr val="accent1">
+                <a:shade val="50000"/>
+              </a:schemeClr>
+            </a:lnRef>
+            <a:fillRef idx="1">
+              <a:schemeClr val="accent1"/>
+            </a:fillRef>
+            <a:effectRef idx="0">
+              <a:schemeClr val="accent1"/>
+            </a:effectRef>
+            <a:fontRef idx="minor">
+              <a:schemeClr val="lt1"/>
+            </a:fontRef>
+          </p:style>
+          <p:txBody>
+            <a:bodyPr rtlCol="0" anchor="ctr"/>
+            <a:lstStyle/>
+            <a:p>
+              <a:pPr algn="ctr"/>
+              <a:r>
+                <a:rPr lang="en-US" sz="1500" dirty="0">
+                  <a:solidFill>
+                    <a:schemeClr val="tx1"/>
+                  </a:solidFill>
+                  <a:latin typeface="Times New Roman" panose="02020603050405020304" pitchFamily="18" charset="0"/>
+                  <a:cs typeface="Times New Roman" panose="02020603050405020304" pitchFamily="18" charset="0"/>
+                </a:rPr>
+                <a:t>Human Annotator</a:t>
+              </a:r>
+            </a:p>
+          </p:txBody>
+        </p:sp>
+        <p:sp>
+          <p:nvSpPr>
+            <p:cNvPr id="14" name="Rectangle 13">
+              <a:extLst>
+                <a:ext uri="{FF2B5EF4-FFF2-40B4-BE49-F238E27FC236}">
+                  <a16:creationId xmlns:a16="http://schemas.microsoft.com/office/drawing/2014/main" id="{9C3D0526-A0BC-F842-A690-1DFE1A6F79E3}"/>
+                </a:ext>
+              </a:extLst>
+            </p:cNvPr>
+            <p:cNvSpPr/>
+            <p:nvPr/>
+          </p:nvSpPr>
+          <p:spPr>
+            <a:xfrm>
+              <a:off x="6539839" y="5571913"/>
+              <a:ext cx="1524980" cy="292608"/>
+            </a:xfrm>
+            <a:prstGeom prst="rect">
+              <a:avLst/>
+            </a:prstGeom>
+            <a:solidFill>
+              <a:schemeClr val="bg1"/>
+            </a:solidFill>
+            <a:ln>
+              <a:solidFill>
+                <a:schemeClr val="bg1"/>
+              </a:solidFill>
+            </a:ln>
+          </p:spPr>
+          <p:style>
+            <a:lnRef idx="2">
+              <a:schemeClr val="accent1">
+                <a:shade val="50000"/>
+              </a:schemeClr>
+            </a:lnRef>
+            <a:fillRef idx="1">
+              <a:schemeClr val="accent1"/>
+            </a:fillRef>
+            <a:effectRef idx="0">
+              <a:schemeClr val="accent1"/>
+            </a:effectRef>
+            <a:fontRef idx="minor">
+              <a:schemeClr val="lt1"/>
+            </a:fontRef>
+          </p:style>
+          <p:txBody>
+            <a:bodyPr rtlCol="0" anchor="ctr"/>
+            <a:lstStyle/>
+            <a:p>
+              <a:pPr algn="ctr"/>
+              <a:r>
+                <a:rPr lang="en-US" sz="1500" dirty="0">
+                  <a:solidFill>
+                    <a:schemeClr val="tx1"/>
+                  </a:solidFill>
+                  <a:latin typeface="Times New Roman" panose="02020603050405020304" pitchFamily="18" charset="0"/>
+                  <a:cs typeface="Times New Roman" panose="02020603050405020304" pitchFamily="18" charset="0"/>
+                </a:rPr>
+                <a:t>Query Strategies</a:t>
+              </a:r>
+            </a:p>
+          </p:txBody>
+        </p:sp>
+        <p:sp>
+          <p:nvSpPr>
+            <p:cNvPr id="15" name="Rectangle 14">
+              <a:extLst>
+                <a:ext uri="{FF2B5EF4-FFF2-40B4-BE49-F238E27FC236}">
+                  <a16:creationId xmlns:a16="http://schemas.microsoft.com/office/drawing/2014/main" id="{723A14C9-38F8-5D45-B18D-E7DA49E57B4C}"/>
+                </a:ext>
+              </a:extLst>
+            </p:cNvPr>
+            <p:cNvSpPr/>
+            <p:nvPr/>
+          </p:nvSpPr>
+          <p:spPr>
+            <a:xfrm>
+              <a:off x="1749589" y="2333411"/>
+              <a:ext cx="1373168" cy="292608"/>
+            </a:xfrm>
+            <a:prstGeom prst="rect">
+              <a:avLst/>
+            </a:prstGeom>
+            <a:solidFill>
+              <a:schemeClr val="bg1"/>
+            </a:solidFill>
+            <a:ln>
+              <a:solidFill>
+                <a:schemeClr val="bg1"/>
+              </a:solidFill>
+            </a:ln>
+          </p:spPr>
+          <p:style>
+            <a:lnRef idx="2">
+              <a:schemeClr val="accent1">
+                <a:shade val="50000"/>
+              </a:schemeClr>
+            </a:lnRef>
+            <a:fillRef idx="1">
+              <a:schemeClr val="accent1"/>
+            </a:fillRef>
+            <a:effectRef idx="0">
+              <a:schemeClr val="accent1"/>
+            </a:effectRef>
+            <a:fontRef idx="minor">
+              <a:schemeClr val="lt1"/>
+            </a:fontRef>
+          </p:style>
+          <p:txBody>
+            <a:bodyPr rtlCol="0" anchor="ctr"/>
+            <a:lstStyle/>
+            <a:p>
+              <a:pPr algn="ctr"/>
+              <a:r>
+                <a:rPr lang="en-US" sz="1500" dirty="0">
+                  <a:solidFill>
+                    <a:schemeClr val="tx1"/>
+                  </a:solidFill>
+                  <a:latin typeface="Times New Roman" panose="02020603050405020304" pitchFamily="18" charset="0"/>
+                  <a:cs typeface="Times New Roman" panose="02020603050405020304" pitchFamily="18" charset="0"/>
+                </a:rPr>
+                <a:t>Model Training</a:t>
+              </a:r>
+            </a:p>
+          </p:txBody>
+        </p:sp>
+        <p:sp>
+          <p:nvSpPr>
+            <p:cNvPr id="16" name="Rectangle 15">
+              <a:extLst>
+                <a:ext uri="{FF2B5EF4-FFF2-40B4-BE49-F238E27FC236}">
+                  <a16:creationId xmlns:a16="http://schemas.microsoft.com/office/drawing/2014/main" id="{9865F9CF-CCB0-0D4B-B40A-100F984E28EB}"/>
+                </a:ext>
+              </a:extLst>
+            </p:cNvPr>
+            <p:cNvSpPr/>
+            <p:nvPr/>
+          </p:nvSpPr>
+          <p:spPr>
+            <a:xfrm>
+              <a:off x="1854679" y="3764292"/>
+              <a:ext cx="897148" cy="459064"/>
+            </a:xfrm>
+            <a:prstGeom prst="rect">
+              <a:avLst/>
+            </a:prstGeom>
+            <a:solidFill>
+              <a:srgbClr val="09FFFF"/>
+            </a:solidFill>
+            <a:ln>
+              <a:solidFill>
+                <a:srgbClr val="09FFFF"/>
+              </a:solidFill>
+            </a:ln>
+          </p:spPr>
+          <p:style>
+            <a:lnRef idx="2">
+              <a:schemeClr val="accent1">
+                <a:shade val="50000"/>
+              </a:schemeClr>
+            </a:lnRef>
+            <a:fillRef idx="1">
+              <a:schemeClr val="accent1"/>
+            </a:fillRef>
+            <a:effectRef idx="0">
+              <a:schemeClr val="accent1"/>
+            </a:effectRef>
+            <a:fontRef idx="minor">
+              <a:schemeClr val="lt1"/>
+            </a:fontRef>
+          </p:style>
+          <p:txBody>
+            <a:bodyPr rtlCol="0" anchor="ctr"/>
+            <a:lstStyle/>
+            <a:p>
+              <a:pPr algn="ctr"/>
+              <a:r>
+                <a:rPr lang="en-US" sz="1500" dirty="0">
+                  <a:solidFill>
+                    <a:schemeClr val="tx1"/>
+                  </a:solidFill>
+                  <a:latin typeface="Times New Roman" panose="02020603050405020304" pitchFamily="18" charset="0"/>
+                  <a:cs typeface="Times New Roman" panose="02020603050405020304" pitchFamily="18" charset="0"/>
+                </a:rPr>
+                <a:t>Labeled</a:t>
+              </a:r>
+            </a:p>
+            <a:p>
+              <a:pPr algn="ctr"/>
+              <a:r>
+                <a:rPr lang="en-US" sz="1500" dirty="0">
+                  <a:solidFill>
+                    <a:schemeClr val="tx1"/>
+                  </a:solidFill>
+                  <a:latin typeface="Times New Roman" panose="02020603050405020304" pitchFamily="18" charset="0"/>
+                  <a:cs typeface="Times New Roman" panose="02020603050405020304" pitchFamily="18" charset="0"/>
+                </a:rPr>
+                <a:t>Data</a:t>
+              </a:r>
+            </a:p>
+          </p:txBody>
+        </p:sp>
+      </p:grpSp>
     </p:spTree>
     <p:extLst>
       <p:ext uri="{BB962C8B-B14F-4D97-AF65-F5344CB8AC3E}">
-        <p14:creationId xmlns:p14="http://schemas.microsoft.com/office/powerpoint/2010/main" val="1791750936"/>
+        <p14:creationId xmlns:p14="http://schemas.microsoft.com/office/powerpoint/2010/main" val="2066962699"/>
       </p:ext>
     </p:extLst>
   </p:cSld>
